--- a/modulo-01/01.06 - Trabalhando com Tabelas Internas Complexas/01.06_Trabalhando_com_tabelas_internas_complexas.pptx
+++ b/modulo-01/01.06 - Trabalhando com Tabelas Internas Complexas/01.06_Trabalhando_com_tabelas_internas_complexas.pptx
@@ -2947,7 +2947,7 @@
         <p:spPr>
           <a:xfrm>
             <a:off x="640080" y="1700784"/>
-            <a:ext cx="1997964" cy="292608"/>
+            <a:ext cx="2619756" cy="292608"/>
           </a:xfrm>
           <a:prstGeom prst="rect">
             <a:avLst/>
@@ -2967,7 +2967,7 @@
         <p:spPr>
           <a:xfrm>
             <a:off x="640080" y="1700784"/>
-            <a:ext cx="1997964" cy="27432"/>
+            <a:ext cx="2619756" cy="27432"/>
           </a:xfrm>
           <a:prstGeom prst="rect">
             <a:avLst/>
@@ -2987,7 +2987,7 @@
         <p:spPr>
           <a:xfrm>
             <a:off x="731520" y="1719072"/>
-            <a:ext cx="1815084" cy="274320"/>
+            <a:ext cx="2436876" cy="274320"/>
           </a:xfrm>
           <a:prstGeom prst="rect">
             <a:avLst/>
@@ -3008,7 +3008,7 @@
                   <a:srgbClr val="FFFFFF"/>
                 </a:solidFill>
               </a:rPr>
-              <a:t>zcl_06_read.clas.abap</a:t>
+              <a:t>zcl_pc_tabelas_demo.clas.abap</a:t>
             </a:r>
             <a:endParaRPr lang="en-US" sz="950" dirty="0"/>
           </a:p>
@@ -3044,7 +3044,7 @@
                   <a:srgbClr val="9DA5B4"/>
                 </a:solidFill>
               </a:rPr>
-              <a:t>ZS4D400_## › ZCL_06_READ › main</a:t>
+              <a:t>Exemplo sobre ZAVBS_PC_ESTOQUE › main</a:t>
             </a:r>
             <a:endParaRPr lang="en-US" sz="850" dirty="0"/>
           </a:p>
@@ -3452,7 +3452,7 @@
                 <a:ea typeface="Courier New" pitchFamily="34" charset="-122"/>
                 <a:cs typeface="Courier New" pitchFamily="34" charset="-120"/>
               </a:rPr>
-              <a:t>route</a:t>
+              <a:t>fone</a:t>
             </a:r>
             <a:r>
               <a:rPr lang="en-US" sz="1050" dirty="0">
@@ -3507,7 +3507,7 @@
                 <a:ea typeface="Courier New" pitchFamily="34" charset="-122"/>
                 <a:cs typeface="Courier New" pitchFamily="34" charset="-120"/>
               </a:rPr>
-              <a:t>connections</a:t>
+              <a:t>itens</a:t>
             </a:r>
             <a:r>
               <a:rPr lang="en-US" sz="1050" dirty="0">
@@ -3540,7 +3540,29 @@
                 <a:ea typeface="Courier New" pitchFamily="34" charset="-122"/>
                 <a:cs typeface="Courier New" pitchFamily="34" charset="-120"/>
               </a:rPr>
-              <a:t>airport_from_id</a:t>
+              <a:t>nome</a:t>
+            </a:r>
+            <a:r>
+              <a:rPr lang="en-US" sz="1050" dirty="0">
+                <a:solidFill>
+                  <a:srgbClr val="CCCCCC"/>
+                </a:solidFill>
+                <a:latin typeface="Courier New" pitchFamily="34" charset="0"/>
+                <a:ea typeface="Courier New" pitchFamily="34" charset="-122"/>
+                <a:cs typeface="Courier New" pitchFamily="34" charset="-120"/>
+              </a:rPr>
+              <a:t>      </a:t>
+            </a:r>
+            <a:r>
+              <a:rPr lang="en-US" sz="1050" dirty="0">
+                <a:solidFill>
+                  <a:srgbClr val="CCCCCC"/>
+                </a:solidFill>
+                <a:latin typeface="Courier New" pitchFamily="34" charset="0"/>
+                <a:ea typeface="Courier New" pitchFamily="34" charset="-122"/>
+                <a:cs typeface="Courier New" pitchFamily="34" charset="-120"/>
+              </a:rPr>
+              <a:t>=</a:t>
             </a:r>
             <a:r>
               <a:rPr lang="en-US" sz="1050" dirty="0">
@@ -3556,35 +3578,13 @@
             <a:r>
               <a:rPr lang="en-US" sz="1050" dirty="0">
                 <a:solidFill>
-                  <a:srgbClr val="CCCCCC"/>
-                </a:solidFill>
-                <a:latin typeface="Courier New" pitchFamily="34" charset="0"/>
-                <a:ea typeface="Courier New" pitchFamily="34" charset="-122"/>
-                <a:cs typeface="Courier New" pitchFamily="34" charset="-120"/>
-              </a:rPr>
-              <a:t>=</a:t>
-            </a:r>
-            <a:r>
-              <a:rPr lang="en-US" sz="1050" dirty="0">
-                <a:solidFill>
-                  <a:srgbClr val="CCCCCC"/>
-                </a:solidFill>
-                <a:latin typeface="Courier New" pitchFamily="34" charset="0"/>
-                <a:ea typeface="Courier New" pitchFamily="34" charset="-122"/>
-                <a:cs typeface="Courier New" pitchFamily="34" charset="-120"/>
-              </a:rPr>
-              <a:t> </a:t>
-            </a:r>
-            <a:r>
-              <a:rPr lang="en-US" sz="1050" dirty="0">
-                <a:solidFill>
                   <a:srgbClr val="CE9178"/>
                 </a:solidFill>
                 <a:latin typeface="Courier New" pitchFamily="34" charset="0"/>
                 <a:ea typeface="Courier New" pitchFamily="34" charset="-122"/>
                 <a:cs typeface="Courier New" pitchFamily="34" charset="-120"/>
               </a:rPr>
-              <a:t>'SFO'</a:t>
+              <a:t>'Fone Bluetooth'</a:t>
             </a:r>
             <a:endParaRPr lang="en-US" sz="1050" dirty="0"/>
           </a:p>
@@ -3604,29 +3604,29 @@
                 <a:ea typeface="Courier New" pitchFamily="34" charset="-122"/>
                 <a:cs typeface="Courier New" pitchFamily="34" charset="-120"/>
               </a:rPr>
-              <a:t>                               </a:t>
-            </a:r>
-            <a:r>
-              <a:rPr lang="en-US" sz="1050" dirty="0">
-                <a:solidFill>
-                  <a:srgbClr val="CCCCCC"/>
-                </a:solidFill>
-                <a:latin typeface="Courier New" pitchFamily="34" charset="0"/>
-                <a:ea typeface="Courier New" pitchFamily="34" charset="-122"/>
-                <a:cs typeface="Courier New" pitchFamily="34" charset="-120"/>
-              </a:rPr>
-              <a:t>airport_to_id</a:t>
-            </a:r>
-            <a:r>
-              <a:rPr lang="en-US" sz="1050" dirty="0">
-                <a:solidFill>
-                  <a:srgbClr val="CCCCCC"/>
-                </a:solidFill>
-                <a:latin typeface="Courier New" pitchFamily="34" charset="0"/>
-                <a:ea typeface="Courier New" pitchFamily="34" charset="-122"/>
-                <a:cs typeface="Courier New" pitchFamily="34" charset="-120"/>
-              </a:rPr>
-              <a:t>   </a:t>
+              <a:t>                        </a:t>
+            </a:r>
+            <a:r>
+              <a:rPr lang="en-US" sz="1050" dirty="0">
+                <a:solidFill>
+                  <a:srgbClr val="CCCCCC"/>
+                </a:solidFill>
+                <a:latin typeface="Courier New" pitchFamily="34" charset="0"/>
+                <a:ea typeface="Courier New" pitchFamily="34" charset="-122"/>
+                <a:cs typeface="Courier New" pitchFamily="34" charset="-120"/>
+              </a:rPr>
+              <a:t>categoria</a:t>
+            </a:r>
+            <a:r>
+              <a:rPr lang="en-US" sz="1050" dirty="0">
+                <a:solidFill>
+                  <a:srgbClr val="CCCCCC"/>
+                </a:solidFill>
+                <a:latin typeface="Courier New" pitchFamily="34" charset="0"/>
+                <a:ea typeface="Courier New" pitchFamily="34" charset="-122"/>
+                <a:cs typeface="Courier New" pitchFamily="34" charset="-120"/>
+              </a:rPr>
+              <a:t> </a:t>
             </a:r>
             <a:r>
               <a:rPr lang="en-US" sz="1050" dirty="0">
@@ -3659,7 +3659,7 @@
                 <a:ea typeface="Courier New" pitchFamily="34" charset="-122"/>
                 <a:cs typeface="Courier New" pitchFamily="34" charset="-120"/>
               </a:rPr>
-              <a:t>'SIN'</a:t>
+              <a:t>'ELETRONICOS'</a:t>
             </a:r>
             <a:r>
               <a:rPr lang="en-US" sz="1050" dirty="0">
@@ -3842,7 +3842,7 @@
                 <a:ea typeface="Courier New" pitchFamily="34" charset="-122"/>
                 <a:cs typeface="Courier New" pitchFamily="34" charset="-120"/>
               </a:rPr>
-              <a:t>`Rota não encontrada`</a:t>
+              <a:t>`Item não encontrado`</a:t>
             </a:r>
             <a:r>
               <a:rPr lang="en-US" sz="1050" dirty="0">
@@ -4001,7 +4001,7 @@
                 <a:ea typeface="Courier New" pitchFamily="34" charset="-122"/>
                 <a:cs typeface="Courier New" pitchFamily="34" charset="-120"/>
               </a:rPr>
-              <a:t>connections</a:t>
+              <a:t>itens</a:t>
             </a:r>
             <a:r>
               <a:rPr lang="en-US" sz="1050" dirty="0">
@@ -4034,7 +4034,7 @@
                 <a:ea typeface="Courier New" pitchFamily="34" charset="-122"/>
                 <a:cs typeface="Courier New" pitchFamily="34" charset="-120"/>
               </a:rPr>
-              <a:t>carrier_id</a:t>
+              <a:t>categoria</a:t>
             </a:r>
             <a:r>
               <a:rPr lang="en-US" sz="1050" dirty="0">
@@ -4078,7 +4078,7 @@
                 <a:ea typeface="Courier New" pitchFamily="34" charset="-122"/>
                 <a:cs typeface="Courier New" pitchFamily="34" charset="-120"/>
               </a:rPr>
-              <a:t>'LH'</a:t>
+              <a:t>'INFORMATICA'</a:t>
             </a:r>
             <a:r>
               <a:rPr lang="en-US" sz="1050" dirty="0">
@@ -4219,7 +4219,7 @@
                 <a:ea typeface="Courier New" pitchFamily="34" charset="-122"/>
                 <a:cs typeface="Courier New" pitchFamily="34" charset="-120"/>
               </a:rPr>
-              <a:t>`Há voos da Lufthansa`</a:t>
+              <a:t>`Há itens de informática`</a:t>
             </a:r>
             <a:r>
               <a:rPr lang="en-US" sz="1050" dirty="0">
@@ -4345,7 +4345,7 @@
                 <a:ea typeface="Courier New" pitchFamily="34" charset="-122"/>
                 <a:cs typeface="Courier New" pitchFamily="34" charset="-120"/>
               </a:rPr>
-              <a:t>name</a:t>
+              <a:t>status</a:t>
             </a:r>
             <a:r>
               <a:rPr lang="en-US" sz="1050" dirty="0">
@@ -4416,13 +4416,13 @@
             <a:r>
               <a:rPr lang="en-US" sz="1050" dirty="0">
                 <a:solidFill>
-                  <a:srgbClr val="4EC9B0"/>
-                </a:solidFill>
-                <a:latin typeface="Courier New" pitchFamily="34" charset="0"/>
-                <a:ea typeface="Courier New" pitchFamily="34" charset="-122"/>
-                <a:cs typeface="Courier New" pitchFamily="34" charset="-120"/>
-              </a:rPr>
-              <a:t>/dmo/carrier_name</a:t>
+                  <a:srgbClr val="CCCCCC"/>
+                </a:solidFill>
+                <a:latin typeface="Courier New" pitchFamily="34" charset="0"/>
+                <a:ea typeface="Courier New" pitchFamily="34" charset="-122"/>
+                <a:cs typeface="Courier New" pitchFamily="34" charset="-120"/>
+              </a:rPr>
+              <a:t>zta_pc_codelist-descricao</a:t>
             </a:r>
             <a:r>
               <a:rPr lang="en-US" sz="1050" dirty="0">
@@ -4453,18 +4453,18 @@
                 <a:ea typeface="Courier New" pitchFamily="34" charset="-122"/>
                 <a:cs typeface="Courier New" pitchFamily="34" charset="-120"/>
               </a:rPr>
-              <a:t>               </a:t>
-            </a:r>
-            <a:r>
-              <a:rPr lang="en-US" sz="1050" dirty="0">
-                <a:solidFill>
-                  <a:srgbClr val="CCCCCC"/>
-                </a:solidFill>
-                <a:latin typeface="Courier New" pitchFamily="34" charset="0"/>
-                <a:ea typeface="Courier New" pitchFamily="34" charset="-122"/>
-                <a:cs typeface="Courier New" pitchFamily="34" charset="-120"/>
-              </a:rPr>
-              <a:t>carriers</a:t>
+              <a:t>                 </a:t>
+            </a:r>
+            <a:r>
+              <a:rPr lang="en-US" sz="1050" dirty="0">
+                <a:solidFill>
+                  <a:srgbClr val="CCCCCC"/>
+                </a:solidFill>
+                <a:latin typeface="Courier New" pitchFamily="34" charset="0"/>
+                <a:ea typeface="Courier New" pitchFamily="34" charset="-122"/>
+                <a:cs typeface="Courier New" pitchFamily="34" charset="-120"/>
+              </a:rPr>
+              <a:t>textos</a:t>
             </a:r>
             <a:r>
               <a:rPr lang="en-US" sz="1050" dirty="0">
@@ -4497,7 +4497,7 @@
                 <a:ea typeface="Courier New" pitchFamily="34" charset="-122"/>
                 <a:cs typeface="Courier New" pitchFamily="34" charset="-120"/>
               </a:rPr>
-              <a:t>carrier_id</a:t>
+              <a:t>lista</a:t>
             </a:r>
             <a:r>
               <a:rPr lang="en-US" sz="1050" dirty="0">
@@ -4541,6 +4541,72 @@
                 <a:ea typeface="Courier New" pitchFamily="34" charset="-122"/>
                 <a:cs typeface="Courier New" pitchFamily="34" charset="-120"/>
               </a:rPr>
+              <a:t>'STATUS_PEDIDO'</a:t>
+            </a:r>
+            <a:r>
+              <a:rPr lang="en-US" sz="1050" dirty="0">
+                <a:solidFill>
+                  <a:srgbClr val="CCCCCC"/>
+                </a:solidFill>
+                <a:latin typeface="Courier New" pitchFamily="34" charset="0"/>
+                <a:ea typeface="Courier New" pitchFamily="34" charset="-122"/>
+                <a:cs typeface="Courier New" pitchFamily="34" charset="-120"/>
+              </a:rPr>
+              <a:t> </a:t>
+            </a:r>
+            <a:r>
+              <a:rPr lang="en-US" sz="1050" dirty="0">
+                <a:solidFill>
+                  <a:srgbClr val="CCCCCC"/>
+                </a:solidFill>
+                <a:latin typeface="Courier New" pitchFamily="34" charset="0"/>
+                <a:ea typeface="Courier New" pitchFamily="34" charset="-122"/>
+                <a:cs typeface="Courier New" pitchFamily="34" charset="-120"/>
+              </a:rPr>
+              <a:t>codigo</a:t>
+            </a:r>
+            <a:r>
+              <a:rPr lang="en-US" sz="1050" dirty="0">
+                <a:solidFill>
+                  <a:srgbClr val="CCCCCC"/>
+                </a:solidFill>
+                <a:latin typeface="Courier New" pitchFamily="34" charset="0"/>
+                <a:ea typeface="Courier New" pitchFamily="34" charset="-122"/>
+                <a:cs typeface="Courier New" pitchFamily="34" charset="-120"/>
+              </a:rPr>
+              <a:t> </a:t>
+            </a:r>
+            <a:r>
+              <a:rPr lang="en-US" sz="1050" dirty="0">
+                <a:solidFill>
+                  <a:srgbClr val="CCCCCC"/>
+                </a:solidFill>
+                <a:latin typeface="Courier New" pitchFamily="34" charset="0"/>
+                <a:ea typeface="Courier New" pitchFamily="34" charset="-122"/>
+                <a:cs typeface="Courier New" pitchFamily="34" charset="-120"/>
+              </a:rPr>
+              <a:t>=</a:t>
+            </a:r>
+            <a:r>
+              <a:rPr lang="en-US" sz="1050" dirty="0">
+                <a:solidFill>
+                  <a:srgbClr val="CCCCCC"/>
+                </a:solidFill>
+                <a:latin typeface="Courier New" pitchFamily="34" charset="0"/>
+                <a:ea typeface="Courier New" pitchFamily="34" charset="-122"/>
+                <a:cs typeface="Courier New" pitchFamily="34" charset="-120"/>
+              </a:rPr>
+              <a:t> </a:t>
+            </a:r>
+            <a:r>
+              <a:rPr lang="en-US" sz="1050" dirty="0">
+                <a:solidFill>
+                  <a:srgbClr val="CE9178"/>
+                </a:solidFill>
+                <a:latin typeface="Courier New" pitchFamily="34" charset="0"/>
+                <a:ea typeface="Courier New" pitchFamily="34" charset="-122"/>
+                <a:cs typeface="Courier New" pitchFamily="34" charset="-120"/>
+              </a:rPr>
               <a:t>'XX'</a:t>
             </a:r>
             <a:r>
@@ -4585,7 +4651,7 @@
                 <a:ea typeface="Courier New" pitchFamily="34" charset="-122"/>
                 <a:cs typeface="Courier New" pitchFamily="34" charset="-120"/>
               </a:rPr>
-              <a:t>name</a:t>
+              <a:t>descricao</a:t>
             </a:r>
             <a:endParaRPr lang="en-US" sz="1050" dirty="0"/>
           </a:p>
@@ -4605,7 +4671,7 @@
                 <a:ea typeface="Courier New" pitchFamily="34" charset="-122"/>
                 <a:cs typeface="Courier New" pitchFamily="34" charset="-120"/>
               </a:rPr>
-              <a:t>               </a:t>
+              <a:t>                 </a:t>
             </a:r>
             <a:r>
               <a:rPr lang="en-US" sz="1050" dirty="0">
@@ -4638,7 +4704,7 @@
                 <a:ea typeface="Courier New" pitchFamily="34" charset="-122"/>
                 <a:cs typeface="Courier New" pitchFamily="34" charset="-120"/>
               </a:rPr>
-              <a:t>'desconhecida'</a:t>
+              <a:t>'desconhecido'</a:t>
             </a:r>
             <a:r>
               <a:rPr lang="en-US" sz="1050" dirty="0">
@@ -5430,7 +5496,7 @@
         <p:spPr>
           <a:xfrm>
             <a:off x="640080" y="1700784"/>
-            <a:ext cx="2153412" cy="292608"/>
+            <a:ext cx="2619756" cy="292608"/>
           </a:xfrm>
           <a:prstGeom prst="rect">
             <a:avLst/>
@@ -5450,7 +5516,7 @@
         <p:spPr>
           <a:xfrm>
             <a:off x="640080" y="1700784"/>
-            <a:ext cx="2153412" cy="27432"/>
+            <a:ext cx="2619756" cy="27432"/>
           </a:xfrm>
           <a:prstGeom prst="rect">
             <a:avLst/>
@@ -5470,7 +5536,7 @@
         <p:spPr>
           <a:xfrm>
             <a:off x="731520" y="1719072"/>
-            <a:ext cx="1970532" cy="274320"/>
+            <a:ext cx="2436876" cy="274320"/>
           </a:xfrm>
           <a:prstGeom prst="rect">
             <a:avLst/>
@@ -5491,7 +5557,7 @@
                   <a:srgbClr val="FFFFFF"/>
                 </a:solidFill>
               </a:rPr>
-              <a:t>zcl_06_change.clas.abap</a:t>
+              <a:t>zcl_pc_tabelas_demo.clas.abap</a:t>
             </a:r>
             <a:endParaRPr lang="en-US" sz="950" dirty="0"/>
           </a:p>
@@ -5527,7 +5593,7 @@
                   <a:srgbClr val="9DA5B4"/>
                 </a:solidFill>
               </a:rPr>
-              <a:t>ZS4D400_## › ZCL_06_CHANGE › main</a:t>
+              <a:t>Exemplo sobre ZAVBS_PC_ESTOQUE › main</a:t>
             </a:r>
             <a:endParaRPr lang="en-US" sz="850" dirty="0"/>
           </a:p>
@@ -5915,7 +5981,7 @@
                 <a:ea typeface="Courier New" pitchFamily="34" charset="-122"/>
                 <a:cs typeface="Courier New" pitchFamily="34" charset="-120"/>
               </a:rPr>
-              <a:t>connections</a:t>
+              <a:t>itens</a:t>
             </a:r>
             <a:r>
               <a:rPr lang="en-US" sz="1050" dirty="0">
@@ -5981,7 +6047,7 @@
                 <a:ea typeface="Courier New" pitchFamily="34" charset="-122"/>
                 <a:cs typeface="Courier New" pitchFamily="34" charset="-120"/>
               </a:rPr>
-              <a:t>c</a:t>
+              <a:t>i</a:t>
             </a:r>
             <a:r>
               <a:rPr lang="en-US" sz="1050" dirty="0">
@@ -6036,7 +6102,7 @@
                 <a:ea typeface="Courier New" pitchFamily="34" charset="-122"/>
                 <a:cs typeface="Courier New" pitchFamily="34" charset="-120"/>
               </a:rPr>
-              <a:t>airport_from_id</a:t>
+              <a:t>qtde_disponivel</a:t>
             </a:r>
             <a:r>
               <a:rPr lang="en-US" sz="1050" dirty="0">
@@ -6058,6 +6124,17 @@
                 <a:ea typeface="Courier New" pitchFamily="34" charset="-122"/>
                 <a:cs typeface="Courier New" pitchFamily="34" charset="-120"/>
               </a:rPr>
+              <a:t>&lt;</a:t>
+            </a:r>
+            <a:r>
+              <a:rPr lang="en-US" sz="1050" dirty="0">
+                <a:solidFill>
+                  <a:srgbClr val="CCCCCC"/>
+                </a:solidFill>
+                <a:latin typeface="Courier New" pitchFamily="34" charset="0"/>
+                <a:ea typeface="Courier New" pitchFamily="34" charset="-122"/>
+                <a:cs typeface="Courier New" pitchFamily="34" charset="-120"/>
+              </a:rPr>
               <a:t>=</a:t>
             </a:r>
             <a:r>
@@ -6074,13 +6151,13 @@
             <a:r>
               <a:rPr lang="en-US" sz="1050" dirty="0">
                 <a:solidFill>
-                  <a:srgbClr val="CE9178"/>
-                </a:solidFill>
-                <a:latin typeface="Courier New" pitchFamily="34" charset="0"/>
-                <a:ea typeface="Courier New" pitchFamily="34" charset="-122"/>
-                <a:cs typeface="Courier New" pitchFamily="34" charset="-120"/>
-              </a:rPr>
-              <a:t>'FRA'</a:t>
+                  <a:srgbClr val="B5CEA8"/>
+                </a:solidFill>
+                <a:latin typeface="Courier New" pitchFamily="34" charset="0"/>
+                <a:ea typeface="Courier New" pitchFamily="34" charset="-122"/>
+                <a:cs typeface="Courier New" pitchFamily="34" charset="-120"/>
+              </a:rPr>
+              <a:t>10</a:t>
             </a:r>
             <a:r>
               <a:rPr lang="en-US" sz="1050" dirty="0">
@@ -6177,7 +6254,7 @@
                 <a:ea typeface="Courier New" pitchFamily="34" charset="-122"/>
                 <a:cs typeface="Courier New" pitchFamily="34" charset="-120"/>
               </a:rPr>
-              <a:t>|{ c-carrier_id } { c-connection_id }|</a:t>
+              <a:t>|{ i-sku } está acabando|</a:t>
             </a:r>
             <a:r>
               <a:rPr lang="en-US" sz="1050" dirty="0">
@@ -6303,7 +6380,7 @@
                 <a:ea typeface="Courier New" pitchFamily="34" charset="-122"/>
                 <a:cs typeface="Courier New" pitchFamily="34" charset="-120"/>
               </a:rPr>
-              <a:t>carrier</a:t>
+              <a:t>texto</a:t>
             </a:r>
             <a:r>
               <a:rPr lang="en-US" sz="1050" dirty="0">
@@ -6358,7 +6435,7 @@
                 <a:ea typeface="Courier New" pitchFamily="34" charset="-122"/>
                 <a:cs typeface="Courier New" pitchFamily="34" charset="-120"/>
               </a:rPr>
-              <a:t>carriers</a:t>
+              <a:t>textos</a:t>
             </a:r>
             <a:r>
               <a:rPr lang="en-US" sz="1050" dirty="0">
@@ -6391,7 +6468,7 @@
                 <a:ea typeface="Courier New" pitchFamily="34" charset="-122"/>
                 <a:cs typeface="Courier New" pitchFamily="34" charset="-120"/>
               </a:rPr>
-              <a:t>carrier_id</a:t>
+              <a:t>lista</a:t>
             </a:r>
             <a:r>
               <a:rPr lang="en-US" sz="1050" dirty="0">
@@ -6435,7 +6512,73 @@
                 <a:ea typeface="Courier New" pitchFamily="34" charset="-122"/>
                 <a:cs typeface="Courier New" pitchFamily="34" charset="-120"/>
               </a:rPr>
-              <a:t>'JL'</a:t>
+              <a:t>'STATUS_PEDIDO'</a:t>
+            </a:r>
+            <a:r>
+              <a:rPr lang="en-US" sz="1050" dirty="0">
+                <a:solidFill>
+                  <a:srgbClr val="CCCCCC"/>
+                </a:solidFill>
+                <a:latin typeface="Courier New" pitchFamily="34" charset="0"/>
+                <a:ea typeface="Courier New" pitchFamily="34" charset="-122"/>
+                <a:cs typeface="Courier New" pitchFamily="34" charset="-120"/>
+              </a:rPr>
+              <a:t> </a:t>
+            </a:r>
+            <a:r>
+              <a:rPr lang="en-US" sz="1050" dirty="0">
+                <a:solidFill>
+                  <a:srgbClr val="CCCCCC"/>
+                </a:solidFill>
+                <a:latin typeface="Courier New" pitchFamily="34" charset="0"/>
+                <a:ea typeface="Courier New" pitchFamily="34" charset="-122"/>
+                <a:cs typeface="Courier New" pitchFamily="34" charset="-120"/>
+              </a:rPr>
+              <a:t>codigo</a:t>
+            </a:r>
+            <a:r>
+              <a:rPr lang="en-US" sz="1050" dirty="0">
+                <a:solidFill>
+                  <a:srgbClr val="CCCCCC"/>
+                </a:solidFill>
+                <a:latin typeface="Courier New" pitchFamily="34" charset="0"/>
+                <a:ea typeface="Courier New" pitchFamily="34" charset="-122"/>
+                <a:cs typeface="Courier New" pitchFamily="34" charset="-120"/>
+              </a:rPr>
+              <a:t> </a:t>
+            </a:r>
+            <a:r>
+              <a:rPr lang="en-US" sz="1050" dirty="0">
+                <a:solidFill>
+                  <a:srgbClr val="CCCCCC"/>
+                </a:solidFill>
+                <a:latin typeface="Courier New" pitchFamily="34" charset="0"/>
+                <a:ea typeface="Courier New" pitchFamily="34" charset="-122"/>
+                <a:cs typeface="Courier New" pitchFamily="34" charset="-120"/>
+              </a:rPr>
+              <a:t>=</a:t>
+            </a:r>
+            <a:r>
+              <a:rPr lang="en-US" sz="1050" dirty="0">
+                <a:solidFill>
+                  <a:srgbClr val="CCCCCC"/>
+                </a:solidFill>
+                <a:latin typeface="Courier New" pitchFamily="34" charset="0"/>
+                <a:ea typeface="Courier New" pitchFamily="34" charset="-122"/>
+                <a:cs typeface="Courier New" pitchFamily="34" charset="-120"/>
+              </a:rPr>
+              <a:t> </a:t>
+            </a:r>
+            <a:r>
+              <a:rPr lang="en-US" sz="1050" dirty="0">
+                <a:solidFill>
+                  <a:srgbClr val="CE9178"/>
+                </a:solidFill>
+                <a:latin typeface="Courier New" pitchFamily="34" charset="0"/>
+                <a:ea typeface="Courier New" pitchFamily="34" charset="-122"/>
+                <a:cs typeface="Courier New" pitchFamily="34" charset="-120"/>
+              </a:rPr>
+              <a:t>'ABERTO'</a:t>
             </a:r>
             <a:r>
               <a:rPr lang="en-US" sz="1050" dirty="0">
@@ -6488,7 +6631,7 @@
                 <a:ea typeface="Courier New" pitchFamily="34" charset="-122"/>
                 <a:cs typeface="Courier New" pitchFamily="34" charset="-120"/>
               </a:rPr>
-              <a:t>carrier-currency_code</a:t>
+              <a:t>texto-descricao</a:t>
             </a:r>
             <a:r>
               <a:rPr lang="en-US" sz="1050" dirty="0">
@@ -6532,7 +6675,7 @@
                 <a:ea typeface="Courier New" pitchFamily="34" charset="-122"/>
                 <a:cs typeface="Courier New" pitchFamily="34" charset="-120"/>
               </a:rPr>
-              <a:t>'JPY'</a:t>
+              <a:t>'Em aberto'</a:t>
             </a:r>
             <a:r>
               <a:rPr lang="en-US" sz="1050" dirty="0">
@@ -6607,7 +6750,7 @@
                 <a:ea typeface="Courier New" pitchFamily="34" charset="-122"/>
                 <a:cs typeface="Courier New" pitchFamily="34" charset="-120"/>
               </a:rPr>
-              <a:t>carriers</a:t>
+              <a:t>textos</a:t>
             </a:r>
             <a:r>
               <a:rPr lang="en-US" sz="1050" dirty="0">
@@ -6651,7 +6794,7 @@
                 <a:ea typeface="Courier New" pitchFamily="34" charset="-122"/>
                 <a:cs typeface="Courier New" pitchFamily="34" charset="-120"/>
               </a:rPr>
-              <a:t>carrier</a:t>
+              <a:t>texto</a:t>
             </a:r>
             <a:r>
               <a:rPr lang="en-US" sz="1050" dirty="0">
@@ -6768,7 +6911,7 @@
                 <a:ea typeface="Courier New" pitchFamily="34" charset="-122"/>
                 <a:cs typeface="Courier New" pitchFamily="34" charset="-120"/>
               </a:rPr>
-              <a:t>carrier_list</a:t>
+              <a:t>pedido_itens</a:t>
             </a:r>
             <a:r>
               <a:rPr lang="en-US" sz="1050" dirty="0">
@@ -6845,7 +6988,7 @@
                 <a:ea typeface="Courier New" pitchFamily="34" charset="-122"/>
                 <a:cs typeface="Courier New" pitchFamily="34" charset="-120"/>
               </a:rPr>
-              <a:t>line</a:t>
+              <a:t>linha</a:t>
             </a:r>
             <a:r>
               <a:rPr lang="en-US" sz="1050" dirty="0">
@@ -6920,7 +7063,7 @@
                 <a:ea typeface="Courier New" pitchFamily="34" charset="-122"/>
                 <a:cs typeface="Courier New" pitchFamily="34" charset="-120"/>
               </a:rPr>
-              <a:t>line</a:t>
+              <a:t>linha</a:t>
             </a:r>
             <a:r>
               <a:rPr lang="en-US" sz="1050" dirty="0">
@@ -6953,7 +7096,7 @@
                 <a:ea typeface="Courier New" pitchFamily="34" charset="-122"/>
                 <a:cs typeface="Courier New" pitchFamily="34" charset="-120"/>
               </a:rPr>
-              <a:t>carrier_name</a:t>
+              <a:t>sku</a:t>
             </a:r>
             <a:r>
               <a:rPr lang="en-US" sz="1050" dirty="0">
@@ -7041,7 +7184,7 @@
                 <a:ea typeface="Courier New" pitchFamily="34" charset="-122"/>
                 <a:cs typeface="Courier New" pitchFamily="34" charset="-120"/>
               </a:rPr>
-              <a:t>line</a:t>
+              <a:t>linha</a:t>
             </a:r>
             <a:r>
               <a:rPr lang="en-US" sz="1050" dirty="0">
@@ -7074,7 +7217,7 @@
                 <a:ea typeface="Courier New" pitchFamily="34" charset="-122"/>
                 <a:cs typeface="Courier New" pitchFamily="34" charset="-120"/>
               </a:rPr>
-              <a:t>carrier_name</a:t>
+              <a:t>sku</a:t>
             </a:r>
             <a:r>
               <a:rPr lang="en-US" sz="1050" dirty="0">
@@ -7200,7 +7343,7 @@
                 <a:ea typeface="Courier New" pitchFamily="34" charset="-122"/>
                 <a:cs typeface="Courier New" pitchFamily="34" charset="-120"/>
               </a:rPr>
-              <a:t>connections</a:t>
+              <a:t>itens</a:t>
             </a:r>
             <a:r>
               <a:rPr lang="en-US" sz="1050" dirty="0">
@@ -7244,7 +7387,7 @@
                 <a:ea typeface="Courier New" pitchFamily="34" charset="-122"/>
                 <a:cs typeface="Courier New" pitchFamily="34" charset="-120"/>
               </a:rPr>
-              <a:t>airport_to_id</a:t>
+              <a:t>qtde_disponivel</a:t>
             </a:r>
             <a:r>
               <a:rPr lang="en-US" sz="1050" dirty="0">
@@ -7282,13 +7425,13 @@
             <a:r>
               <a:rPr lang="en-US" sz="1050" dirty="0">
                 <a:solidFill>
-                  <a:srgbClr val="CE9178"/>
-                </a:solidFill>
-                <a:latin typeface="Courier New" pitchFamily="34" charset="0"/>
-                <a:ea typeface="Courier New" pitchFamily="34" charset="-122"/>
-                <a:cs typeface="Courier New" pitchFamily="34" charset="-120"/>
-              </a:rPr>
-              <a:t>'XYZ'</a:t>
+                  <a:srgbClr val="B5CEA8"/>
+                </a:solidFill>
+                <a:latin typeface="Courier New" pitchFamily="34" charset="0"/>
+                <a:ea typeface="Courier New" pitchFamily="34" charset="-122"/>
+                <a:cs typeface="Courier New" pitchFamily="34" charset="-120"/>
+              </a:rPr>
+              <a:t>0</a:t>
             </a:r>
             <a:r>
               <a:rPr lang="en-US" sz="1050" dirty="0">
@@ -7341,7 +7484,7 @@
                 <a:ea typeface="Courier New" pitchFamily="34" charset="-122"/>
                 <a:cs typeface="Courier New" pitchFamily="34" charset="-120"/>
               </a:rPr>
-              <a:t>carrier_list</a:t>
+              <a:t>pedido_itens</a:t>
             </a:r>
             <a:r>
               <a:rPr lang="en-US" sz="1050" dirty="0">
@@ -7385,7 +7528,7 @@
                 <a:ea typeface="Courier New" pitchFamily="34" charset="-122"/>
                 <a:cs typeface="Courier New" pitchFamily="34" charset="-120"/>
               </a:rPr>
-              <a:t>carrier_name</a:t>
+              <a:t>qtde</a:t>
             </a:r>
             <a:r>
               <a:rPr lang="en-US" sz="1050" dirty="0">
@@ -8454,7 +8597,7 @@
                   <a:srgbClr val="D1EFFF"/>
                 </a:solidFill>
               </a:rPr>
-              <a:t>  aula 04.05</a:t>
+              <a:t>  aula 02.05</a:t>
             </a:r>
             <a:endParaRPr lang="en-US" sz="1400" dirty="0"/>
           </a:p>
@@ -9138,7 +9281,7 @@
                   <a:srgbClr val="1D2D3E"/>
                 </a:solidFill>
               </a:rPr>
-              <a:t>, assunto da aula 04.05.</a:t>
+              <a:t>, assunto da aula 02.05.</a:t>
             </a:r>
             <a:endParaRPr lang="en-US" sz="1400" dirty="0"/>
           </a:p>
@@ -9160,7 +9303,7 @@
         </p:blipFill>
         <p:spPr>
           <a:xfrm>
-            <a:off x="850392" y="2339467"/>
+            <a:off x="4624730" y="2339467"/>
             <a:ext cx="256032" cy="256032"/>
           </a:xfrm>
           <a:prstGeom prst="rect">
@@ -9184,7 +9327,7 @@
         </p:blipFill>
         <p:spPr>
           <a:xfrm>
-            <a:off x="4624730" y="2339467"/>
+            <a:off x="8399069" y="2339467"/>
             <a:ext cx="256032" cy="256032"/>
           </a:xfrm>
           <a:prstGeom prst="rect">
@@ -9208,7 +9351,7 @@
         </p:blipFill>
         <p:spPr>
           <a:xfrm>
-            <a:off x="8399069" y="2339467"/>
+            <a:off x="850392" y="2339467"/>
             <a:ext cx="256032" cy="256032"/>
           </a:xfrm>
           <a:prstGeom prst="rect">
@@ -10101,7 +10244,7 @@
         </p:blipFill>
         <p:spPr>
           <a:xfrm>
-            <a:off x="822960" y="2926080"/>
+            <a:off x="6355080" y="1965960"/>
             <a:ext cx="256032" cy="256032"/>
           </a:xfrm>
           <a:prstGeom prst="rect">
@@ -10125,7 +10268,7 @@
         </p:blipFill>
         <p:spPr>
           <a:xfrm>
-            <a:off x="6355080" y="1965960"/>
+            <a:off x="822960" y="2926080"/>
             <a:ext cx="256032" cy="256032"/>
           </a:xfrm>
           <a:prstGeom prst="rect">
@@ -11744,7 +11887,7 @@
                   <a:srgbClr val="1D2D3E"/>
                 </a:solidFill>
               </a:rPr>
-              <a:t>passamos de tabelas de uma coluna para tabelas com linhas estruturadas e escolhemos o tipo certo para cada forma de acesso.</a:t>
+              <a:t>passamos de tabelas de uma coluna para tabelas com linhas estruturadas, como a lista de itens de estoque e as listas de códigos do projeto, e escolhemos o tipo certo para cada forma de acesso.</a:t>
             </a:r>
             <a:endParaRPr lang="en-US" sz="1400" dirty="0"/>
           </a:p>
@@ -11814,7 +11957,7 @@
         </p:blipFill>
         <p:spPr>
           <a:xfrm>
-            <a:off x="8275091" y="1847088"/>
+            <a:off x="2636444" y="3858768"/>
             <a:ext cx="347472" cy="347472"/>
           </a:xfrm>
           <a:prstGeom prst="rect">
@@ -11838,7 +11981,7 @@
         </p:blipFill>
         <p:spPr>
           <a:xfrm>
-            <a:off x="5455768" y="3858768"/>
+            <a:off x="11094415" y="1847088"/>
             <a:ext cx="347472" cy="347472"/>
           </a:xfrm>
           <a:prstGeom prst="rect">
@@ -11862,7 +12005,7 @@
         </p:blipFill>
         <p:spPr>
           <a:xfrm>
-            <a:off x="11094415" y="1847088"/>
+            <a:off x="5455768" y="3858768"/>
             <a:ext cx="347472" cy="347472"/>
           </a:xfrm>
           <a:prstGeom prst="rect">
@@ -11886,7 +12029,7 @@
         </p:blipFill>
         <p:spPr>
           <a:xfrm>
-            <a:off x="2636444" y="3858768"/>
+            <a:off x="8275091" y="1847088"/>
             <a:ext cx="347472" cy="347472"/>
           </a:xfrm>
           <a:prstGeom prst="rect">
@@ -11934,8 +12077,8 @@
         </p:blipFill>
         <p:spPr>
           <a:xfrm>
-            <a:off x="11094415" y="3858768"/>
-            <a:ext cx="347472" cy="347472"/>
+            <a:off x="749808" y="5751576"/>
+            <a:ext cx="310896" cy="310896"/>
           </a:xfrm>
           <a:prstGeom prst="rect">
             <a:avLst/>
@@ -11958,8 +12101,8 @@
         </p:blipFill>
         <p:spPr>
           <a:xfrm>
-            <a:off x="749808" y="5751576"/>
-            <a:ext cx="310896" cy="310896"/>
+            <a:off x="11094415" y="3858768"/>
+            <a:ext cx="347472" cy="347472"/>
           </a:xfrm>
           <a:prstGeom prst="rect">
             <a:avLst/>
@@ -12747,7 +12890,7 @@
         </p:blipFill>
         <p:spPr>
           <a:xfrm>
-            <a:off x="850392" y="2209800"/>
+            <a:off x="850392" y="4325112"/>
             <a:ext cx="256032" cy="256032"/>
           </a:xfrm>
           <a:prstGeom prst="rect">
@@ -12771,7 +12914,7 @@
         </p:blipFill>
         <p:spPr>
           <a:xfrm>
-            <a:off x="6511900" y="2209800"/>
+            <a:off x="850392" y="2209800"/>
             <a:ext cx="256032" cy="256032"/>
           </a:xfrm>
           <a:prstGeom prst="rect">
@@ -12795,7 +12938,7 @@
         </p:blipFill>
         <p:spPr>
           <a:xfrm>
-            <a:off x="850392" y="4325112"/>
+            <a:off x="6511900" y="2209800"/>
             <a:ext cx="256032" cy="256032"/>
           </a:xfrm>
           <a:prstGeom prst="rect">
@@ -14674,7 +14817,7 @@
         <p:spPr>
           <a:xfrm>
             <a:off x="640080" y="1700784"/>
-            <a:ext cx="1997964" cy="292608"/>
+            <a:ext cx="2619756" cy="292608"/>
           </a:xfrm>
           <a:prstGeom prst="rect">
             <a:avLst/>
@@ -14694,7 +14837,7 @@
         <p:spPr>
           <a:xfrm>
             <a:off x="640080" y="1700784"/>
-            <a:ext cx="1997964" cy="27432"/>
+            <a:ext cx="2619756" cy="27432"/>
           </a:xfrm>
           <a:prstGeom prst="rect">
             <a:avLst/>
@@ -14714,7 +14857,7 @@
         <p:spPr>
           <a:xfrm>
             <a:off x="731520" y="1719072"/>
-            <a:ext cx="1815084" cy="274320"/>
+            <a:ext cx="2436876" cy="274320"/>
           </a:xfrm>
           <a:prstGeom prst="rect">
             <a:avLst/>
@@ -14735,7 +14878,7 @@
                   <a:srgbClr val="FFFFFF"/>
                 </a:solidFill>
               </a:rPr>
-              <a:t>zcl_06_itab.clas.abap</a:t>
+              <a:t>zcl_pc_tabelas_demo.clas.abap</a:t>
             </a:r>
             <a:endParaRPr lang="en-US" sz="950" dirty="0"/>
           </a:p>
@@ -14771,7 +14914,7 @@
                   <a:srgbClr val="9DA5B4"/>
                 </a:solidFill>
               </a:rPr>
-              <a:t>ZS4D400_## › ZCL_06_ITAB › main</a:t>
+              <a:t>Exemplo sobre ZAVBS_PC_ESTOQUE › main</a:t>
             </a:r>
             <a:endParaRPr lang="en-US" sz="850" dirty="0"/>
           </a:p>
@@ -15097,26 +15240,6 @@
             </a:r>
             <a:endParaRPr lang="en-US" sz="1050" dirty="0"/>
           </a:p>
-          <a:p>
-            <a:pPr algn="r" indent="0" marL="0">
-              <a:lnSpc>
-                <a:spcPct val="105000"/>
-              </a:lnSpc>
-              <a:buNone/>
-            </a:pPr>
-            <a:r>
-              <a:rPr lang="en-US" sz="1050" dirty="0">
-                <a:solidFill>
-                  <a:srgbClr val="6E7681"/>
-                </a:solidFill>
-                <a:latin typeface="Courier New" pitchFamily="34" charset="0"/>
-                <a:ea typeface="Courier New" pitchFamily="34" charset="-122"/>
-                <a:cs typeface="Courier New" pitchFamily="34" charset="-120"/>
-              </a:rPr>
-              <a:t>16</a:t>
-            </a:r>
-            <a:endParaRPr lang="en-US" sz="1050" dirty="0"/>
-          </a:p>
         </p:txBody>
       </p:sp>
       <p:sp>
@@ -15232,7 +15355,7 @@
                 <a:ea typeface="Courier New" pitchFamily="34" charset="-122"/>
                 <a:cs typeface="Courier New" pitchFamily="34" charset="-120"/>
               </a:rPr>
-              <a:t>st_connection</a:t>
+              <a:t>st_item</a:t>
             </a:r>
             <a:r>
               <a:rPr lang="en-US" sz="1050" dirty="0">
@@ -15274,18 +15397,18 @@
                 <a:ea typeface="Courier New" pitchFamily="34" charset="-122"/>
                 <a:cs typeface="Courier New" pitchFamily="34" charset="-120"/>
               </a:rPr>
-              <a:t>carrier_id</a:t>
-            </a:r>
-            <a:r>
-              <a:rPr lang="en-US" sz="1050" dirty="0">
-                <a:solidFill>
-                  <a:srgbClr val="CCCCCC"/>
-                </a:solidFill>
-                <a:latin typeface="Courier New" pitchFamily="34" charset="0"/>
-                <a:ea typeface="Courier New" pitchFamily="34" charset="-122"/>
-                <a:cs typeface="Courier New" pitchFamily="34" charset="-120"/>
-              </a:rPr>
-              <a:t>      </a:t>
+              <a:t>sku</a:t>
+            </a:r>
+            <a:r>
+              <a:rPr lang="en-US" sz="1050" dirty="0">
+                <a:solidFill>
+                  <a:srgbClr val="CCCCCC"/>
+                </a:solidFill>
+                <a:latin typeface="Courier New" pitchFamily="34" charset="0"/>
+                <a:ea typeface="Courier New" pitchFamily="34" charset="-122"/>
+                <a:cs typeface="Courier New" pitchFamily="34" charset="-120"/>
+              </a:rPr>
+              <a:t>             </a:t>
             </a:r>
             <a:r>
               <a:rPr lang="en-US" sz="1050" dirty="0">
@@ -15312,13 +15435,13 @@
             <a:r>
               <a:rPr lang="en-US" sz="1050" dirty="0">
                 <a:solidFill>
-                  <a:srgbClr val="4EC9B0"/>
-                </a:solidFill>
-                <a:latin typeface="Courier New" pitchFamily="34" charset="0"/>
-                <a:ea typeface="Courier New" pitchFamily="34" charset="-122"/>
-                <a:cs typeface="Courier New" pitchFamily="34" charset="-120"/>
-              </a:rPr>
-              <a:t>/dmo/carrier_id</a:t>
+                  <a:srgbClr val="CCCCCC"/>
+                </a:solidFill>
+                <a:latin typeface="Courier New" pitchFamily="34" charset="0"/>
+                <a:ea typeface="Courier New" pitchFamily="34" charset="-122"/>
+                <a:cs typeface="Courier New" pitchFamily="34" charset="-120"/>
+              </a:rPr>
+              <a:t>zta_pc_item-sku</a:t>
             </a:r>
             <a:r>
               <a:rPr lang="en-US" sz="1050" dirty="0">
@@ -15360,18 +15483,18 @@
                 <a:ea typeface="Courier New" pitchFamily="34" charset="-122"/>
                 <a:cs typeface="Courier New" pitchFamily="34" charset="-120"/>
               </a:rPr>
-              <a:t>connection_id</a:t>
-            </a:r>
-            <a:r>
-              <a:rPr lang="en-US" sz="1050" dirty="0">
-                <a:solidFill>
-                  <a:srgbClr val="CCCCCC"/>
-                </a:solidFill>
-                <a:latin typeface="Courier New" pitchFamily="34" charset="0"/>
-                <a:ea typeface="Courier New" pitchFamily="34" charset="-122"/>
-                <a:cs typeface="Courier New" pitchFamily="34" charset="-120"/>
-              </a:rPr>
-              <a:t>   </a:t>
+              <a:t>nome</a:t>
+            </a:r>
+            <a:r>
+              <a:rPr lang="en-US" sz="1050" dirty="0">
+                <a:solidFill>
+                  <a:srgbClr val="CCCCCC"/>
+                </a:solidFill>
+                <a:latin typeface="Courier New" pitchFamily="34" charset="0"/>
+                <a:ea typeface="Courier New" pitchFamily="34" charset="-122"/>
+                <a:cs typeface="Courier New" pitchFamily="34" charset="-120"/>
+              </a:rPr>
+              <a:t>            </a:t>
             </a:r>
             <a:r>
               <a:rPr lang="en-US" sz="1050" dirty="0">
@@ -15398,13 +15521,13 @@
             <a:r>
               <a:rPr lang="en-US" sz="1050" dirty="0">
                 <a:solidFill>
-                  <a:srgbClr val="4EC9B0"/>
-                </a:solidFill>
-                <a:latin typeface="Courier New" pitchFamily="34" charset="0"/>
-                <a:ea typeface="Courier New" pitchFamily="34" charset="-122"/>
-                <a:cs typeface="Courier New" pitchFamily="34" charset="-120"/>
-              </a:rPr>
-              <a:t>/dmo/connection_id</a:t>
+                  <a:srgbClr val="CCCCCC"/>
+                </a:solidFill>
+                <a:latin typeface="Courier New" pitchFamily="34" charset="0"/>
+                <a:ea typeface="Courier New" pitchFamily="34" charset="-122"/>
+                <a:cs typeface="Courier New" pitchFamily="34" charset="-120"/>
+              </a:rPr>
+              <a:t>zta_pc_item-nome</a:t>
             </a:r>
             <a:r>
               <a:rPr lang="en-US" sz="1050" dirty="0">
@@ -15446,7 +15569,29 @@
                 <a:ea typeface="Courier New" pitchFamily="34" charset="-122"/>
                 <a:cs typeface="Courier New" pitchFamily="34" charset="-120"/>
               </a:rPr>
-              <a:t>airport_from_id</a:t>
+              <a:t>categoria</a:t>
+            </a:r>
+            <a:r>
+              <a:rPr lang="en-US" sz="1050" dirty="0">
+                <a:solidFill>
+                  <a:srgbClr val="CCCCCC"/>
+                </a:solidFill>
+                <a:latin typeface="Courier New" pitchFamily="34" charset="0"/>
+                <a:ea typeface="Courier New" pitchFamily="34" charset="-122"/>
+                <a:cs typeface="Courier New" pitchFamily="34" charset="-120"/>
+              </a:rPr>
+              <a:t>       </a:t>
+            </a:r>
+            <a:r>
+              <a:rPr lang="en-US" sz="1050" dirty="0">
+                <a:solidFill>
+                  <a:srgbClr val="569CD6"/>
+                </a:solidFill>
+                <a:latin typeface="Courier New" pitchFamily="34" charset="0"/>
+                <a:ea typeface="Courier New" pitchFamily="34" charset="-122"/>
+                <a:cs typeface="Courier New" pitchFamily="34" charset="-120"/>
+              </a:rPr>
+              <a:t>TYPE</a:t>
             </a:r>
             <a:r>
               <a:rPr lang="en-US" sz="1050" dirty="0">
@@ -15462,35 +15607,13 @@
             <a:r>
               <a:rPr lang="en-US" sz="1050" dirty="0">
                 <a:solidFill>
-                  <a:srgbClr val="569CD6"/>
-                </a:solidFill>
-                <a:latin typeface="Courier New" pitchFamily="34" charset="0"/>
-                <a:ea typeface="Courier New" pitchFamily="34" charset="-122"/>
-                <a:cs typeface="Courier New" pitchFamily="34" charset="-120"/>
-              </a:rPr>
-              <a:t>TYPE</a:t>
-            </a:r>
-            <a:r>
-              <a:rPr lang="en-US" sz="1050" dirty="0">
-                <a:solidFill>
-                  <a:srgbClr val="CCCCCC"/>
-                </a:solidFill>
-                <a:latin typeface="Courier New" pitchFamily="34" charset="0"/>
-                <a:ea typeface="Courier New" pitchFamily="34" charset="-122"/>
-                <a:cs typeface="Courier New" pitchFamily="34" charset="-120"/>
-              </a:rPr>
-              <a:t> </a:t>
-            </a:r>
-            <a:r>
-              <a:rPr lang="en-US" sz="1050" dirty="0">
-                <a:solidFill>
-                  <a:srgbClr val="4EC9B0"/>
-                </a:solidFill>
-                <a:latin typeface="Courier New" pitchFamily="34" charset="0"/>
-                <a:ea typeface="Courier New" pitchFamily="34" charset="-122"/>
-                <a:cs typeface="Courier New" pitchFamily="34" charset="-120"/>
-              </a:rPr>
-              <a:t>/dmo/airport_from_id</a:t>
+                  <a:srgbClr val="CCCCCC"/>
+                </a:solidFill>
+                <a:latin typeface="Courier New" pitchFamily="34" charset="0"/>
+                <a:ea typeface="Courier New" pitchFamily="34" charset="-122"/>
+                <a:cs typeface="Courier New" pitchFamily="34" charset="-120"/>
+              </a:rPr>
+              <a:t>zta_pc_item-categoria</a:t>
             </a:r>
             <a:r>
               <a:rPr lang="en-US" sz="1050" dirty="0">
@@ -15532,18 +15655,18 @@
                 <a:ea typeface="Courier New" pitchFamily="34" charset="-122"/>
                 <a:cs typeface="Courier New" pitchFamily="34" charset="-120"/>
               </a:rPr>
-              <a:t>airport_to_id</a:t>
-            </a:r>
-            <a:r>
-              <a:rPr lang="en-US" sz="1050" dirty="0">
-                <a:solidFill>
-                  <a:srgbClr val="CCCCCC"/>
-                </a:solidFill>
-                <a:latin typeface="Courier New" pitchFamily="34" charset="0"/>
-                <a:ea typeface="Courier New" pitchFamily="34" charset="-122"/>
-                <a:cs typeface="Courier New" pitchFamily="34" charset="-120"/>
-              </a:rPr>
-              <a:t>   </a:t>
+              <a:t>qtde_disponivel</a:t>
+            </a:r>
+            <a:r>
+              <a:rPr lang="en-US" sz="1050" dirty="0">
+                <a:solidFill>
+                  <a:srgbClr val="CCCCCC"/>
+                </a:solidFill>
+                <a:latin typeface="Courier New" pitchFamily="34" charset="0"/>
+                <a:ea typeface="Courier New" pitchFamily="34" charset="-122"/>
+                <a:cs typeface="Courier New" pitchFamily="34" charset="-120"/>
+              </a:rPr>
+              <a:t> </a:t>
             </a:r>
             <a:r>
               <a:rPr lang="en-US" sz="1050" dirty="0">
@@ -15570,13 +15693,13 @@
             <a:r>
               <a:rPr lang="en-US" sz="1050" dirty="0">
                 <a:solidFill>
-                  <a:srgbClr val="4EC9B0"/>
-                </a:solidFill>
-                <a:latin typeface="Courier New" pitchFamily="34" charset="0"/>
-                <a:ea typeface="Courier New" pitchFamily="34" charset="-122"/>
-                <a:cs typeface="Courier New" pitchFamily="34" charset="-120"/>
-              </a:rPr>
-              <a:t>/dmo/airport_to_id</a:t>
+                  <a:srgbClr val="CCCCCC"/>
+                </a:solidFill>
+                <a:latin typeface="Courier New" pitchFamily="34" charset="0"/>
+                <a:ea typeface="Courier New" pitchFamily="34" charset="-122"/>
+                <a:cs typeface="Courier New" pitchFamily="34" charset="-120"/>
+              </a:rPr>
+              <a:t>zta_pc_item-qtde_disponivel</a:t>
             </a:r>
             <a:r>
               <a:rPr lang="en-US" sz="1050" dirty="0">
@@ -15607,29 +15730,7 @@
                 <a:ea typeface="Courier New" pitchFamily="34" charset="-122"/>
                 <a:cs typeface="Courier New" pitchFamily="34" charset="-120"/>
               </a:rPr>
-              <a:t>         </a:t>
-            </a:r>
-            <a:r>
-              <a:rPr lang="en-US" sz="1050" dirty="0">
-                <a:solidFill>
-                  <a:srgbClr val="CCCCCC"/>
-                </a:solidFill>
-                <a:latin typeface="Courier New" pitchFamily="34" charset="0"/>
-                <a:ea typeface="Courier New" pitchFamily="34" charset="-122"/>
-                <a:cs typeface="Courier New" pitchFamily="34" charset="-120"/>
-              </a:rPr>
-              <a:t>carrier_name</a:t>
-            </a:r>
-            <a:r>
-              <a:rPr lang="en-US" sz="1050" dirty="0">
-                <a:solidFill>
-                  <a:srgbClr val="CCCCCC"/>
-                </a:solidFill>
-                <a:latin typeface="Courier New" pitchFamily="34" charset="0"/>
-                <a:ea typeface="Courier New" pitchFamily="34" charset="-122"/>
-                <a:cs typeface="Courier New" pitchFamily="34" charset="-120"/>
-              </a:rPr>
-              <a:t>    </a:t>
+              <a:t>       </a:t>
             </a:r>
             <a:r>
               <a:rPr lang="en-US" sz="1050" dirty="0">
@@ -15640,7 +15741,7 @@
                 <a:ea typeface="Courier New" pitchFamily="34" charset="-122"/>
                 <a:cs typeface="Courier New" pitchFamily="34" charset="-120"/>
               </a:rPr>
-              <a:t>TYPE</a:t>
+              <a:t>END</a:t>
             </a:r>
             <a:r>
               <a:rPr lang="en-US" sz="1050" dirty="0">
@@ -15656,24 +15757,46 @@
             <a:r>
               <a:rPr lang="en-US" sz="1050" dirty="0">
                 <a:solidFill>
-                  <a:srgbClr val="4EC9B0"/>
-                </a:solidFill>
-                <a:latin typeface="Courier New" pitchFamily="34" charset="0"/>
-                <a:ea typeface="Courier New" pitchFamily="34" charset="-122"/>
-                <a:cs typeface="Courier New" pitchFamily="34" charset="-120"/>
-              </a:rPr>
-              <a:t>/dmo/carrier_name</a:t>
-            </a:r>
-            <a:r>
-              <a:rPr lang="en-US" sz="1050" dirty="0">
-                <a:solidFill>
-                  <a:srgbClr val="CCCCCC"/>
-                </a:solidFill>
-                <a:latin typeface="Courier New" pitchFamily="34" charset="0"/>
-                <a:ea typeface="Courier New" pitchFamily="34" charset="-122"/>
-                <a:cs typeface="Courier New" pitchFamily="34" charset="-120"/>
-              </a:rPr>
-              <a:t>,</a:t>
+                  <a:srgbClr val="569CD6"/>
+                </a:solidFill>
+                <a:latin typeface="Courier New" pitchFamily="34" charset="0"/>
+                <a:ea typeface="Courier New" pitchFamily="34" charset="-122"/>
+                <a:cs typeface="Courier New" pitchFamily="34" charset="-120"/>
+              </a:rPr>
+              <a:t>OF</a:t>
+            </a:r>
+            <a:r>
+              <a:rPr lang="en-US" sz="1050" dirty="0">
+                <a:solidFill>
+                  <a:srgbClr val="CCCCCC"/>
+                </a:solidFill>
+                <a:latin typeface="Courier New" pitchFamily="34" charset="0"/>
+                <a:ea typeface="Courier New" pitchFamily="34" charset="-122"/>
+                <a:cs typeface="Courier New" pitchFamily="34" charset="-120"/>
+              </a:rPr>
+              <a:t> </a:t>
+            </a:r>
+            <a:r>
+              <a:rPr lang="en-US" sz="1050" dirty="0">
+                <a:solidFill>
+                  <a:srgbClr val="CCCCCC"/>
+                </a:solidFill>
+                <a:latin typeface="Courier New" pitchFamily="34" charset="0"/>
+                <a:ea typeface="Courier New" pitchFamily="34" charset="-122"/>
+                <a:cs typeface="Courier New" pitchFamily="34" charset="-120"/>
+              </a:rPr>
+              <a:t>st_item</a:t>
+            </a:r>
+            <a:r>
+              <a:rPr lang="en-US" sz="1050" dirty="0">
+                <a:solidFill>
+                  <a:srgbClr val="CCCCCC"/>
+                </a:solidFill>
+                <a:latin typeface="Courier New" pitchFamily="34" charset="0"/>
+                <a:ea typeface="Courier New" pitchFamily="34" charset="-122"/>
+                <a:cs typeface="Courier New" pitchFamily="34" charset="-120"/>
+              </a:rPr>
+              <a:t>.</a:t>
             </a:r>
             <a:endParaRPr lang="en-US" sz="1050" dirty="0"/>
           </a:p>
@@ -15687,79 +15810,13 @@
             <a:r>
               <a:rPr lang="en-US" sz="1050" dirty="0">
                 <a:solidFill>
-                  <a:srgbClr val="CCCCCC"/>
-                </a:solidFill>
-                <a:latin typeface="Courier New" pitchFamily="34" charset="0"/>
-                <a:ea typeface="Courier New" pitchFamily="34" charset="-122"/>
-                <a:cs typeface="Courier New" pitchFamily="34" charset="-120"/>
-              </a:rPr>
-              <a:t>       </a:t>
-            </a:r>
-            <a:r>
-              <a:rPr lang="en-US" sz="1050" dirty="0">
-                <a:solidFill>
-                  <a:srgbClr val="569CD6"/>
-                </a:solidFill>
-                <a:latin typeface="Courier New" pitchFamily="34" charset="0"/>
-                <a:ea typeface="Courier New" pitchFamily="34" charset="-122"/>
-                <a:cs typeface="Courier New" pitchFamily="34" charset="-120"/>
-              </a:rPr>
-              <a:t>END</a:t>
-            </a:r>
-            <a:r>
-              <a:rPr lang="en-US" sz="1050" dirty="0">
-                <a:solidFill>
-                  <a:srgbClr val="CCCCCC"/>
+                  <a:srgbClr val="000000"/>
                 </a:solidFill>
                 <a:latin typeface="Courier New" pitchFamily="34" charset="0"/>
                 <a:ea typeface="Courier New" pitchFamily="34" charset="-122"/>
                 <a:cs typeface="Courier New" pitchFamily="34" charset="-120"/>
               </a:rPr>
               <a:t> </a:t>
-            </a:r>
-            <a:r>
-              <a:rPr lang="en-US" sz="1050" dirty="0">
-                <a:solidFill>
-                  <a:srgbClr val="569CD6"/>
-                </a:solidFill>
-                <a:latin typeface="Courier New" pitchFamily="34" charset="0"/>
-                <a:ea typeface="Courier New" pitchFamily="34" charset="-122"/>
-                <a:cs typeface="Courier New" pitchFamily="34" charset="-120"/>
-              </a:rPr>
-              <a:t>OF</a:t>
-            </a:r>
-            <a:r>
-              <a:rPr lang="en-US" sz="1050" dirty="0">
-                <a:solidFill>
-                  <a:srgbClr val="CCCCCC"/>
-                </a:solidFill>
-                <a:latin typeface="Courier New" pitchFamily="34" charset="0"/>
-                <a:ea typeface="Courier New" pitchFamily="34" charset="-122"/>
-                <a:cs typeface="Courier New" pitchFamily="34" charset="-120"/>
-              </a:rPr>
-              <a:t> </a:t>
-            </a:r>
-            <a:r>
-              <a:rPr lang="en-US" sz="1050" dirty="0">
-                <a:solidFill>
-                  <a:srgbClr val="CCCCCC"/>
-                </a:solidFill>
-                <a:latin typeface="Courier New" pitchFamily="34" charset="0"/>
-                <a:ea typeface="Courier New" pitchFamily="34" charset="-122"/>
-                <a:cs typeface="Courier New" pitchFamily="34" charset="-120"/>
-              </a:rPr>
-              <a:t>st_connection</a:t>
-            </a:r>
-            <a:r>
-              <a:rPr lang="en-US" sz="1050" dirty="0">
-                <a:solidFill>
-                  <a:srgbClr val="CCCCCC"/>
-                </a:solidFill>
-                <a:latin typeface="Courier New" pitchFamily="34" charset="0"/>
-                <a:ea typeface="Courier New" pitchFamily="34" charset="-122"/>
-                <a:cs typeface="Courier New" pitchFamily="34" charset="-120"/>
-              </a:rPr>
-              <a:t>.</a:t>
             </a:r>
             <a:endParaRPr lang="en-US" sz="1050" dirty="0"/>
           </a:p>
@@ -15773,13 +15830,145 @@
             <a:r>
               <a:rPr lang="en-US" sz="1050" dirty="0">
                 <a:solidFill>
-                  <a:srgbClr val="000000"/>
+                  <a:srgbClr val="569CD6"/>
+                </a:solidFill>
+                <a:latin typeface="Courier New" pitchFamily="34" charset="0"/>
+                <a:ea typeface="Courier New" pitchFamily="34" charset="-122"/>
+                <a:cs typeface="Courier New" pitchFamily="34" charset="-120"/>
+              </a:rPr>
+              <a:t>TYPES</a:t>
+            </a:r>
+            <a:r>
+              <a:rPr lang="en-US" sz="1050" dirty="0">
+                <a:solidFill>
+                  <a:srgbClr val="CCCCCC"/>
                 </a:solidFill>
                 <a:latin typeface="Courier New" pitchFamily="34" charset="0"/>
                 <a:ea typeface="Courier New" pitchFamily="34" charset="-122"/>
                 <a:cs typeface="Courier New" pitchFamily="34" charset="-120"/>
               </a:rPr>
               <a:t> </a:t>
+            </a:r>
+            <a:r>
+              <a:rPr lang="en-US" sz="1050" dirty="0">
+                <a:solidFill>
+                  <a:srgbClr val="CCCCCC"/>
+                </a:solidFill>
+                <a:latin typeface="Courier New" pitchFamily="34" charset="0"/>
+                <a:ea typeface="Courier New" pitchFamily="34" charset="-122"/>
+                <a:cs typeface="Courier New" pitchFamily="34" charset="-120"/>
+              </a:rPr>
+              <a:t>tt_itens</a:t>
+            </a:r>
+            <a:r>
+              <a:rPr lang="en-US" sz="1050" dirty="0">
+                <a:solidFill>
+                  <a:srgbClr val="CCCCCC"/>
+                </a:solidFill>
+                <a:latin typeface="Courier New" pitchFamily="34" charset="0"/>
+                <a:ea typeface="Courier New" pitchFamily="34" charset="-122"/>
+                <a:cs typeface="Courier New" pitchFamily="34" charset="-120"/>
+              </a:rPr>
+              <a:t> </a:t>
+            </a:r>
+            <a:r>
+              <a:rPr lang="en-US" sz="1050" dirty="0">
+                <a:solidFill>
+                  <a:srgbClr val="569CD6"/>
+                </a:solidFill>
+                <a:latin typeface="Courier New" pitchFamily="34" charset="0"/>
+                <a:ea typeface="Courier New" pitchFamily="34" charset="-122"/>
+                <a:cs typeface="Courier New" pitchFamily="34" charset="-120"/>
+              </a:rPr>
+              <a:t>TYPE</a:t>
+            </a:r>
+            <a:r>
+              <a:rPr lang="en-US" sz="1050" dirty="0">
+                <a:solidFill>
+                  <a:srgbClr val="CCCCCC"/>
+                </a:solidFill>
+                <a:latin typeface="Courier New" pitchFamily="34" charset="0"/>
+                <a:ea typeface="Courier New" pitchFamily="34" charset="-122"/>
+                <a:cs typeface="Courier New" pitchFamily="34" charset="-120"/>
+              </a:rPr>
+              <a:t> </a:t>
+            </a:r>
+            <a:r>
+              <a:rPr lang="en-US" sz="1050" dirty="0">
+                <a:solidFill>
+                  <a:srgbClr val="569CD6"/>
+                </a:solidFill>
+                <a:latin typeface="Courier New" pitchFamily="34" charset="0"/>
+                <a:ea typeface="Courier New" pitchFamily="34" charset="-122"/>
+                <a:cs typeface="Courier New" pitchFamily="34" charset="-120"/>
+              </a:rPr>
+              <a:t>SORTED</a:t>
+            </a:r>
+            <a:r>
+              <a:rPr lang="en-US" sz="1050" dirty="0">
+                <a:solidFill>
+                  <a:srgbClr val="CCCCCC"/>
+                </a:solidFill>
+                <a:latin typeface="Courier New" pitchFamily="34" charset="0"/>
+                <a:ea typeface="Courier New" pitchFamily="34" charset="-122"/>
+                <a:cs typeface="Courier New" pitchFamily="34" charset="-120"/>
+              </a:rPr>
+              <a:t> </a:t>
+            </a:r>
+            <a:r>
+              <a:rPr lang="en-US" sz="1050" dirty="0">
+                <a:solidFill>
+                  <a:srgbClr val="569CD6"/>
+                </a:solidFill>
+                <a:latin typeface="Courier New" pitchFamily="34" charset="0"/>
+                <a:ea typeface="Courier New" pitchFamily="34" charset="-122"/>
+                <a:cs typeface="Courier New" pitchFamily="34" charset="-120"/>
+              </a:rPr>
+              <a:t>TABLE</a:t>
+            </a:r>
+            <a:r>
+              <a:rPr lang="en-US" sz="1050" dirty="0">
+                <a:solidFill>
+                  <a:srgbClr val="CCCCCC"/>
+                </a:solidFill>
+                <a:latin typeface="Courier New" pitchFamily="34" charset="0"/>
+                <a:ea typeface="Courier New" pitchFamily="34" charset="-122"/>
+                <a:cs typeface="Courier New" pitchFamily="34" charset="-120"/>
+              </a:rPr>
+              <a:t> </a:t>
+            </a:r>
+            <a:r>
+              <a:rPr lang="en-US" sz="1050" dirty="0">
+                <a:solidFill>
+                  <a:srgbClr val="569CD6"/>
+                </a:solidFill>
+                <a:latin typeface="Courier New" pitchFamily="34" charset="0"/>
+                <a:ea typeface="Courier New" pitchFamily="34" charset="-122"/>
+                <a:cs typeface="Courier New" pitchFamily="34" charset="-120"/>
+              </a:rPr>
+              <a:t>OF</a:t>
+            </a:r>
+            <a:r>
+              <a:rPr lang="en-US" sz="1050" dirty="0">
+                <a:solidFill>
+                  <a:srgbClr val="CCCCCC"/>
+                </a:solidFill>
+                <a:latin typeface="Courier New" pitchFamily="34" charset="0"/>
+                <a:ea typeface="Courier New" pitchFamily="34" charset="-122"/>
+                <a:cs typeface="Courier New" pitchFamily="34" charset="-120"/>
+              </a:rPr>
+              <a:t> </a:t>
+            </a:r>
+            <a:r>
+              <a:rPr lang="en-US" sz="1050" dirty="0">
+                <a:solidFill>
+                  <a:srgbClr val="CCCCCC"/>
+                </a:solidFill>
+                <a:latin typeface="Courier New" pitchFamily="34" charset="0"/>
+                <a:ea typeface="Courier New" pitchFamily="34" charset="-122"/>
+                <a:cs typeface="Courier New" pitchFamily="34" charset="-120"/>
+              </a:rPr>
+              <a:t>st_item</a:t>
             </a:r>
             <a:endParaRPr lang="en-US" sz="1050" dirty="0"/>
           </a:p>
@@ -15793,13 +15982,24 @@
             <a:r>
               <a:rPr lang="en-US" sz="1050" dirty="0">
                 <a:solidFill>
+                  <a:srgbClr val="CCCCCC"/>
+                </a:solidFill>
+                <a:latin typeface="Courier New" pitchFamily="34" charset="0"/>
+                <a:ea typeface="Courier New" pitchFamily="34" charset="-122"/>
+                <a:cs typeface="Courier New" pitchFamily="34" charset="-120"/>
+              </a:rPr>
+              <a:t>               </a:t>
+            </a:r>
+            <a:r>
+              <a:rPr lang="en-US" sz="1050" dirty="0">
+                <a:solidFill>
                   <a:srgbClr val="569CD6"/>
                 </a:solidFill>
                 <a:latin typeface="Courier New" pitchFamily="34" charset="0"/>
                 <a:ea typeface="Courier New" pitchFamily="34" charset="-122"/>
                 <a:cs typeface="Courier New" pitchFamily="34" charset="-120"/>
               </a:rPr>
-              <a:t>TYPES</a:t>
+              <a:t>WITH</a:t>
             </a:r>
             <a:r>
               <a:rPr lang="en-US" sz="1050" dirty="0">
@@ -15815,13 +16015,13 @@
             <a:r>
               <a:rPr lang="en-US" sz="1050" dirty="0">
                 <a:solidFill>
-                  <a:srgbClr val="CCCCCC"/>
-                </a:solidFill>
-                <a:latin typeface="Courier New" pitchFamily="34" charset="0"/>
-                <a:ea typeface="Courier New" pitchFamily="34" charset="-122"/>
-                <a:cs typeface="Courier New" pitchFamily="34" charset="-120"/>
-              </a:rPr>
-              <a:t>tt_connections</a:t>
+                  <a:srgbClr val="569CD6"/>
+                </a:solidFill>
+                <a:latin typeface="Courier New" pitchFamily="34" charset="0"/>
+                <a:ea typeface="Courier New" pitchFamily="34" charset="-122"/>
+                <a:cs typeface="Courier New" pitchFamily="34" charset="-120"/>
+              </a:rPr>
+              <a:t>UNIQUE</a:t>
             </a:r>
             <a:r>
               <a:rPr lang="en-US" sz="1050" dirty="0">
@@ -15843,7 +16043,7 @@
                 <a:ea typeface="Courier New" pitchFamily="34" charset="-122"/>
                 <a:cs typeface="Courier New" pitchFamily="34" charset="-120"/>
               </a:rPr>
-              <a:t>TYPE</a:t>
+              <a:t>KEY</a:t>
             </a:r>
             <a:r>
               <a:rPr lang="en-US" sz="1050" dirty="0">
@@ -15859,79 +16059,24 @@
             <a:r>
               <a:rPr lang="en-US" sz="1050" dirty="0">
                 <a:solidFill>
-                  <a:srgbClr val="569CD6"/>
-                </a:solidFill>
-                <a:latin typeface="Courier New" pitchFamily="34" charset="0"/>
-                <a:ea typeface="Courier New" pitchFamily="34" charset="-122"/>
-                <a:cs typeface="Courier New" pitchFamily="34" charset="-120"/>
-              </a:rPr>
-              <a:t>SORTED</a:t>
-            </a:r>
-            <a:r>
-              <a:rPr lang="en-US" sz="1050" dirty="0">
-                <a:solidFill>
-                  <a:srgbClr val="CCCCCC"/>
-                </a:solidFill>
-                <a:latin typeface="Courier New" pitchFamily="34" charset="0"/>
-                <a:ea typeface="Courier New" pitchFamily="34" charset="-122"/>
-                <a:cs typeface="Courier New" pitchFamily="34" charset="-120"/>
-              </a:rPr>
-              <a:t> </a:t>
-            </a:r>
-            <a:r>
-              <a:rPr lang="en-US" sz="1050" dirty="0">
-                <a:solidFill>
-                  <a:srgbClr val="569CD6"/>
-                </a:solidFill>
-                <a:latin typeface="Courier New" pitchFamily="34" charset="0"/>
-                <a:ea typeface="Courier New" pitchFamily="34" charset="-122"/>
-                <a:cs typeface="Courier New" pitchFamily="34" charset="-120"/>
-              </a:rPr>
-              <a:t>TABLE</a:t>
-            </a:r>
-            <a:r>
-              <a:rPr lang="en-US" sz="1050" dirty="0">
-                <a:solidFill>
-                  <a:srgbClr val="CCCCCC"/>
-                </a:solidFill>
-                <a:latin typeface="Courier New" pitchFamily="34" charset="0"/>
-                <a:ea typeface="Courier New" pitchFamily="34" charset="-122"/>
-                <a:cs typeface="Courier New" pitchFamily="34" charset="-120"/>
-              </a:rPr>
-              <a:t> </a:t>
-            </a:r>
-            <a:r>
-              <a:rPr lang="en-US" sz="1050" dirty="0">
-                <a:solidFill>
-                  <a:srgbClr val="569CD6"/>
-                </a:solidFill>
-                <a:latin typeface="Courier New" pitchFamily="34" charset="0"/>
-                <a:ea typeface="Courier New" pitchFamily="34" charset="-122"/>
-                <a:cs typeface="Courier New" pitchFamily="34" charset="-120"/>
-              </a:rPr>
-              <a:t>OF</a:t>
-            </a:r>
-            <a:r>
-              <a:rPr lang="en-US" sz="1050" dirty="0">
-                <a:solidFill>
-                  <a:srgbClr val="CCCCCC"/>
-                </a:solidFill>
-                <a:latin typeface="Courier New" pitchFamily="34" charset="0"/>
-                <a:ea typeface="Courier New" pitchFamily="34" charset="-122"/>
-                <a:cs typeface="Courier New" pitchFamily="34" charset="-120"/>
-              </a:rPr>
-              <a:t> </a:t>
-            </a:r>
-            <a:r>
-              <a:rPr lang="en-US" sz="1050" dirty="0">
-                <a:solidFill>
-                  <a:srgbClr val="CCCCCC"/>
-                </a:solidFill>
-                <a:latin typeface="Courier New" pitchFamily="34" charset="0"/>
-                <a:ea typeface="Courier New" pitchFamily="34" charset="-122"/>
-                <a:cs typeface="Courier New" pitchFamily="34" charset="-120"/>
-              </a:rPr>
-              <a:t>st_connection</a:t>
+                  <a:srgbClr val="CCCCCC"/>
+                </a:solidFill>
+                <a:latin typeface="Courier New" pitchFamily="34" charset="0"/>
+                <a:ea typeface="Courier New" pitchFamily="34" charset="-122"/>
+                <a:cs typeface="Courier New" pitchFamily="34" charset="-120"/>
+              </a:rPr>
+              <a:t>sku</a:t>
+            </a:r>
+            <a:r>
+              <a:rPr lang="en-US" sz="1050" dirty="0">
+                <a:solidFill>
+                  <a:srgbClr val="CCCCCC"/>
+                </a:solidFill>
+                <a:latin typeface="Courier New" pitchFamily="34" charset="0"/>
+                <a:ea typeface="Courier New" pitchFamily="34" charset="-122"/>
+                <a:cs typeface="Courier New" pitchFamily="34" charset="-120"/>
+              </a:rPr>
+              <a:t>.</a:t>
             </a:r>
             <a:endParaRPr lang="en-US" sz="1050" dirty="0"/>
           </a:p>
@@ -15945,123 +16090,13 @@
             <a:r>
               <a:rPr lang="en-US" sz="1050" dirty="0">
                 <a:solidFill>
-                  <a:srgbClr val="CCCCCC"/>
-                </a:solidFill>
-                <a:latin typeface="Courier New" pitchFamily="34" charset="0"/>
-                <a:ea typeface="Courier New" pitchFamily="34" charset="-122"/>
-                <a:cs typeface="Courier New" pitchFamily="34" charset="-120"/>
-              </a:rPr>
-              <a:t>                     </a:t>
-            </a:r>
-            <a:r>
-              <a:rPr lang="en-US" sz="1050" dirty="0">
-                <a:solidFill>
-                  <a:srgbClr val="569CD6"/>
-                </a:solidFill>
-                <a:latin typeface="Courier New" pitchFamily="34" charset="0"/>
-                <a:ea typeface="Courier New" pitchFamily="34" charset="-122"/>
-                <a:cs typeface="Courier New" pitchFamily="34" charset="-120"/>
-              </a:rPr>
-              <a:t>WITH</a:t>
-            </a:r>
-            <a:r>
-              <a:rPr lang="en-US" sz="1050" dirty="0">
-                <a:solidFill>
-                  <a:srgbClr val="CCCCCC"/>
+                  <a:srgbClr val="000000"/>
                 </a:solidFill>
                 <a:latin typeface="Courier New" pitchFamily="34" charset="0"/>
                 <a:ea typeface="Courier New" pitchFamily="34" charset="-122"/>
                 <a:cs typeface="Courier New" pitchFamily="34" charset="-120"/>
               </a:rPr>
               <a:t> </a:t>
-            </a:r>
-            <a:r>
-              <a:rPr lang="en-US" sz="1050" dirty="0">
-                <a:solidFill>
-                  <a:srgbClr val="569CD6"/>
-                </a:solidFill>
-                <a:latin typeface="Courier New" pitchFamily="34" charset="0"/>
-                <a:ea typeface="Courier New" pitchFamily="34" charset="-122"/>
-                <a:cs typeface="Courier New" pitchFamily="34" charset="-120"/>
-              </a:rPr>
-              <a:t>UNIQUE</a:t>
-            </a:r>
-            <a:r>
-              <a:rPr lang="en-US" sz="1050" dirty="0">
-                <a:solidFill>
-                  <a:srgbClr val="CCCCCC"/>
-                </a:solidFill>
-                <a:latin typeface="Courier New" pitchFamily="34" charset="0"/>
-                <a:ea typeface="Courier New" pitchFamily="34" charset="-122"/>
-                <a:cs typeface="Courier New" pitchFamily="34" charset="-120"/>
-              </a:rPr>
-              <a:t> </a:t>
-            </a:r>
-            <a:r>
-              <a:rPr lang="en-US" sz="1050" dirty="0">
-                <a:solidFill>
-                  <a:srgbClr val="569CD6"/>
-                </a:solidFill>
-                <a:latin typeface="Courier New" pitchFamily="34" charset="0"/>
-                <a:ea typeface="Courier New" pitchFamily="34" charset="-122"/>
-                <a:cs typeface="Courier New" pitchFamily="34" charset="-120"/>
-              </a:rPr>
-              <a:t>KEY</a:t>
-            </a:r>
-            <a:r>
-              <a:rPr lang="en-US" sz="1050" dirty="0">
-                <a:solidFill>
-                  <a:srgbClr val="CCCCCC"/>
-                </a:solidFill>
-                <a:latin typeface="Courier New" pitchFamily="34" charset="0"/>
-                <a:ea typeface="Courier New" pitchFamily="34" charset="-122"/>
-                <a:cs typeface="Courier New" pitchFamily="34" charset="-120"/>
-              </a:rPr>
-              <a:t> </a:t>
-            </a:r>
-            <a:r>
-              <a:rPr lang="en-US" sz="1050" dirty="0">
-                <a:solidFill>
-                  <a:srgbClr val="CCCCCC"/>
-                </a:solidFill>
-                <a:latin typeface="Courier New" pitchFamily="34" charset="0"/>
-                <a:ea typeface="Courier New" pitchFamily="34" charset="-122"/>
-                <a:cs typeface="Courier New" pitchFamily="34" charset="-120"/>
-              </a:rPr>
-              <a:t>carrier_id</a:t>
-            </a:r>
-            <a:r>
-              <a:rPr lang="en-US" sz="1050" dirty="0">
-                <a:solidFill>
-                  <a:srgbClr val="CCCCCC"/>
-                </a:solidFill>
-                <a:latin typeface="Courier New" pitchFamily="34" charset="0"/>
-                <a:ea typeface="Courier New" pitchFamily="34" charset="-122"/>
-                <a:cs typeface="Courier New" pitchFamily="34" charset="-120"/>
-              </a:rPr>
-              <a:t> </a:t>
-            </a:r>
-            <a:r>
-              <a:rPr lang="en-US" sz="1050" dirty="0">
-                <a:solidFill>
-                  <a:srgbClr val="CCCCCC"/>
-                </a:solidFill>
-                <a:latin typeface="Courier New" pitchFamily="34" charset="0"/>
-                <a:ea typeface="Courier New" pitchFamily="34" charset="-122"/>
-                <a:cs typeface="Courier New" pitchFamily="34" charset="-120"/>
-              </a:rPr>
-              <a:t>connection_id</a:t>
-            </a:r>
-            <a:r>
-              <a:rPr lang="en-US" sz="1050" dirty="0">
-                <a:solidFill>
-                  <a:srgbClr val="CCCCCC"/>
-                </a:solidFill>
-                <a:latin typeface="Courier New" pitchFamily="34" charset="0"/>
-                <a:ea typeface="Courier New" pitchFamily="34" charset="-122"/>
-                <a:cs typeface="Courier New" pitchFamily="34" charset="-120"/>
-              </a:rPr>
-              <a:t>.</a:t>
             </a:r>
             <a:endParaRPr lang="en-US" sz="1050" dirty="0"/>
           </a:p>
@@ -16075,13 +16110,90 @@
             <a:r>
               <a:rPr lang="en-US" sz="1050" dirty="0">
                 <a:solidFill>
-                  <a:srgbClr val="000000"/>
+                  <a:srgbClr val="569CD6"/>
+                </a:solidFill>
+                <a:latin typeface="Courier New" pitchFamily="34" charset="0"/>
+                <a:ea typeface="Courier New" pitchFamily="34" charset="-122"/>
+                <a:cs typeface="Courier New" pitchFamily="34" charset="-120"/>
+              </a:rPr>
+              <a:t>DATA</a:t>
+            </a:r>
+            <a:r>
+              <a:rPr lang="en-US" sz="1050" dirty="0">
+                <a:solidFill>
+                  <a:srgbClr val="CCCCCC"/>
                 </a:solidFill>
                 <a:latin typeface="Courier New" pitchFamily="34" charset="0"/>
                 <a:ea typeface="Courier New" pitchFamily="34" charset="-122"/>
                 <a:cs typeface="Courier New" pitchFamily="34" charset="-120"/>
               </a:rPr>
               <a:t> </a:t>
+            </a:r>
+            <a:r>
+              <a:rPr lang="en-US" sz="1050" dirty="0">
+                <a:solidFill>
+                  <a:srgbClr val="CCCCCC"/>
+                </a:solidFill>
+                <a:latin typeface="Courier New" pitchFamily="34" charset="0"/>
+                <a:ea typeface="Courier New" pitchFamily="34" charset="-122"/>
+                <a:cs typeface="Courier New" pitchFamily="34" charset="-120"/>
+              </a:rPr>
+              <a:t>itens</a:t>
+            </a:r>
+            <a:r>
+              <a:rPr lang="en-US" sz="1050" dirty="0">
+                <a:solidFill>
+                  <a:srgbClr val="CCCCCC"/>
+                </a:solidFill>
+                <a:latin typeface="Courier New" pitchFamily="34" charset="0"/>
+                <a:ea typeface="Courier New" pitchFamily="34" charset="-122"/>
+                <a:cs typeface="Courier New" pitchFamily="34" charset="-120"/>
+              </a:rPr>
+              <a:t> </a:t>
+            </a:r>
+            <a:r>
+              <a:rPr lang="en-US" sz="1050" dirty="0">
+                <a:solidFill>
+                  <a:srgbClr val="569CD6"/>
+                </a:solidFill>
+                <a:latin typeface="Courier New" pitchFamily="34" charset="0"/>
+                <a:ea typeface="Courier New" pitchFamily="34" charset="-122"/>
+                <a:cs typeface="Courier New" pitchFamily="34" charset="-120"/>
+              </a:rPr>
+              <a:t>TYPE</a:t>
+            </a:r>
+            <a:r>
+              <a:rPr lang="en-US" sz="1050" dirty="0">
+                <a:solidFill>
+                  <a:srgbClr val="CCCCCC"/>
+                </a:solidFill>
+                <a:latin typeface="Courier New" pitchFamily="34" charset="0"/>
+                <a:ea typeface="Courier New" pitchFamily="34" charset="-122"/>
+                <a:cs typeface="Courier New" pitchFamily="34" charset="-120"/>
+              </a:rPr>
+              <a:t> </a:t>
+            </a:r>
+            <a:r>
+              <a:rPr lang="en-US" sz="1050" dirty="0">
+                <a:solidFill>
+                  <a:srgbClr val="CCCCCC"/>
+                </a:solidFill>
+                <a:latin typeface="Courier New" pitchFamily="34" charset="0"/>
+                <a:ea typeface="Courier New" pitchFamily="34" charset="-122"/>
+                <a:cs typeface="Courier New" pitchFamily="34" charset="-120"/>
+              </a:rPr>
+              <a:t>tt_itens</a:t>
+            </a:r>
+            <a:r>
+              <a:rPr lang="en-US" sz="1050" dirty="0">
+                <a:solidFill>
+                  <a:srgbClr val="CCCCCC"/>
+                </a:solidFill>
+                <a:latin typeface="Courier New" pitchFamily="34" charset="0"/>
+                <a:ea typeface="Courier New" pitchFamily="34" charset="-122"/>
+                <a:cs typeface="Courier New" pitchFamily="34" charset="-120"/>
+              </a:rPr>
+              <a:t>.</a:t>
             </a:r>
             <a:endParaRPr lang="en-US" sz="1050" dirty="0"/>
           </a:p>
@@ -16123,7 +16235,29 @@
                 <a:ea typeface="Courier New" pitchFamily="34" charset="-122"/>
                 <a:cs typeface="Courier New" pitchFamily="34" charset="-120"/>
               </a:rPr>
-              <a:t>connections</a:t>
+              <a:t>item</a:t>
+            </a:r>
+            <a:r>
+              <a:rPr lang="en-US" sz="1050" dirty="0">
+                <a:solidFill>
+                  <a:srgbClr val="CCCCCC"/>
+                </a:solidFill>
+                <a:latin typeface="Courier New" pitchFamily="34" charset="0"/>
+                <a:ea typeface="Courier New" pitchFamily="34" charset="-122"/>
+                <a:cs typeface="Courier New" pitchFamily="34" charset="-120"/>
+              </a:rPr>
+              <a:t>  </a:t>
+            </a:r>
+            <a:r>
+              <a:rPr lang="en-US" sz="1050" dirty="0">
+                <a:solidFill>
+                  <a:srgbClr val="569CD6"/>
+                </a:solidFill>
+                <a:latin typeface="Courier New" pitchFamily="34" charset="0"/>
+                <a:ea typeface="Courier New" pitchFamily="34" charset="-122"/>
+                <a:cs typeface="Courier New" pitchFamily="34" charset="-120"/>
+              </a:rPr>
+              <a:t>LIKE</a:t>
             </a:r>
             <a:r>
               <a:rPr lang="en-US" sz="1050" dirty="0">
@@ -16139,13 +16273,35 @@
             <a:r>
               <a:rPr lang="en-US" sz="1050" dirty="0">
                 <a:solidFill>
+                  <a:srgbClr val="CCCCCC"/>
+                </a:solidFill>
+                <a:latin typeface="Courier New" pitchFamily="34" charset="0"/>
+                <a:ea typeface="Courier New" pitchFamily="34" charset="-122"/>
+                <a:cs typeface="Courier New" pitchFamily="34" charset="-120"/>
+              </a:rPr>
+              <a:t>LINE</a:t>
+            </a:r>
+            <a:r>
+              <a:rPr lang="en-US" sz="1050" dirty="0">
+                <a:solidFill>
+                  <a:srgbClr val="CCCCCC"/>
+                </a:solidFill>
+                <a:latin typeface="Courier New" pitchFamily="34" charset="0"/>
+                <a:ea typeface="Courier New" pitchFamily="34" charset="-122"/>
+                <a:cs typeface="Courier New" pitchFamily="34" charset="-120"/>
+              </a:rPr>
+              <a:t> </a:t>
+            </a:r>
+            <a:r>
+              <a:rPr lang="en-US" sz="1050" dirty="0">
+                <a:solidFill>
                   <a:srgbClr val="569CD6"/>
                 </a:solidFill>
                 <a:latin typeface="Courier New" pitchFamily="34" charset="0"/>
                 <a:ea typeface="Courier New" pitchFamily="34" charset="-122"/>
                 <a:cs typeface="Courier New" pitchFamily="34" charset="-120"/>
               </a:rPr>
-              <a:t>TYPE</a:t>
+              <a:t>OF</a:t>
             </a:r>
             <a:r>
               <a:rPr lang="en-US" sz="1050" dirty="0">
@@ -16167,7 +16323,7 @@
                 <a:ea typeface="Courier New" pitchFamily="34" charset="-122"/>
                 <a:cs typeface="Courier New" pitchFamily="34" charset="-120"/>
               </a:rPr>
-              <a:t>tt_connections</a:t>
+              <a:t>itens</a:t>
             </a:r>
             <a:r>
               <a:rPr lang="en-US" sz="1050" dirty="0">
@@ -16192,134 +16348,13 @@
             <a:r>
               <a:rPr lang="en-US" sz="1050" dirty="0">
                 <a:solidFill>
-                  <a:srgbClr val="569CD6"/>
-                </a:solidFill>
-                <a:latin typeface="Courier New" pitchFamily="34" charset="0"/>
-                <a:ea typeface="Courier New" pitchFamily="34" charset="-122"/>
-                <a:cs typeface="Courier New" pitchFamily="34" charset="-120"/>
-              </a:rPr>
-              <a:t>DATA</a:t>
-            </a:r>
-            <a:r>
-              <a:rPr lang="en-US" sz="1050" dirty="0">
-                <a:solidFill>
-                  <a:srgbClr val="CCCCCC"/>
+                  <a:srgbClr val="000000"/>
                 </a:solidFill>
                 <a:latin typeface="Courier New" pitchFamily="34" charset="0"/>
                 <a:ea typeface="Courier New" pitchFamily="34" charset="-122"/>
                 <a:cs typeface="Courier New" pitchFamily="34" charset="-120"/>
               </a:rPr>
               <a:t> </a:t>
-            </a:r>
-            <a:r>
-              <a:rPr lang="en-US" sz="1050" dirty="0">
-                <a:solidFill>
-                  <a:srgbClr val="CCCCCC"/>
-                </a:solidFill>
-                <a:latin typeface="Courier New" pitchFamily="34" charset="0"/>
-                <a:ea typeface="Courier New" pitchFamily="34" charset="-122"/>
-                <a:cs typeface="Courier New" pitchFamily="34" charset="-120"/>
-              </a:rPr>
-              <a:t>connection</a:t>
-            </a:r>
-            <a:r>
-              <a:rPr lang="en-US" sz="1050" dirty="0">
-                <a:solidFill>
-                  <a:srgbClr val="CCCCCC"/>
-                </a:solidFill>
-                <a:latin typeface="Courier New" pitchFamily="34" charset="0"/>
-                <a:ea typeface="Courier New" pitchFamily="34" charset="-122"/>
-                <a:cs typeface="Courier New" pitchFamily="34" charset="-120"/>
-              </a:rPr>
-              <a:t>  </a:t>
-            </a:r>
-            <a:r>
-              <a:rPr lang="en-US" sz="1050" dirty="0">
-                <a:solidFill>
-                  <a:srgbClr val="569CD6"/>
-                </a:solidFill>
-                <a:latin typeface="Courier New" pitchFamily="34" charset="0"/>
-                <a:ea typeface="Courier New" pitchFamily="34" charset="-122"/>
-                <a:cs typeface="Courier New" pitchFamily="34" charset="-120"/>
-              </a:rPr>
-              <a:t>LIKE</a:t>
-            </a:r>
-            <a:r>
-              <a:rPr lang="en-US" sz="1050" dirty="0">
-                <a:solidFill>
-                  <a:srgbClr val="CCCCCC"/>
-                </a:solidFill>
-                <a:latin typeface="Courier New" pitchFamily="34" charset="0"/>
-                <a:ea typeface="Courier New" pitchFamily="34" charset="-122"/>
-                <a:cs typeface="Courier New" pitchFamily="34" charset="-120"/>
-              </a:rPr>
-              <a:t> </a:t>
-            </a:r>
-            <a:r>
-              <a:rPr lang="en-US" sz="1050" dirty="0">
-                <a:solidFill>
-                  <a:srgbClr val="CCCCCC"/>
-                </a:solidFill>
-                <a:latin typeface="Courier New" pitchFamily="34" charset="0"/>
-                <a:ea typeface="Courier New" pitchFamily="34" charset="-122"/>
-                <a:cs typeface="Courier New" pitchFamily="34" charset="-120"/>
-              </a:rPr>
-              <a:t>LINE</a:t>
-            </a:r>
-            <a:r>
-              <a:rPr lang="en-US" sz="1050" dirty="0">
-                <a:solidFill>
-                  <a:srgbClr val="CCCCCC"/>
-                </a:solidFill>
-                <a:latin typeface="Courier New" pitchFamily="34" charset="0"/>
-                <a:ea typeface="Courier New" pitchFamily="34" charset="-122"/>
-                <a:cs typeface="Courier New" pitchFamily="34" charset="-120"/>
-              </a:rPr>
-              <a:t> </a:t>
-            </a:r>
-            <a:r>
-              <a:rPr lang="en-US" sz="1050" dirty="0">
-                <a:solidFill>
-                  <a:srgbClr val="569CD6"/>
-                </a:solidFill>
-                <a:latin typeface="Courier New" pitchFamily="34" charset="0"/>
-                <a:ea typeface="Courier New" pitchFamily="34" charset="-122"/>
-                <a:cs typeface="Courier New" pitchFamily="34" charset="-120"/>
-              </a:rPr>
-              <a:t>OF</a:t>
-            </a:r>
-            <a:r>
-              <a:rPr lang="en-US" sz="1050" dirty="0">
-                <a:solidFill>
-                  <a:srgbClr val="CCCCCC"/>
-                </a:solidFill>
-                <a:latin typeface="Courier New" pitchFamily="34" charset="0"/>
-                <a:ea typeface="Courier New" pitchFamily="34" charset="-122"/>
-                <a:cs typeface="Courier New" pitchFamily="34" charset="-120"/>
-              </a:rPr>
-              <a:t> </a:t>
-            </a:r>
-            <a:r>
-              <a:rPr lang="en-US" sz="1050" dirty="0">
-                <a:solidFill>
-                  <a:srgbClr val="CCCCCC"/>
-                </a:solidFill>
-                <a:latin typeface="Courier New" pitchFamily="34" charset="0"/>
-                <a:ea typeface="Courier New" pitchFamily="34" charset="-122"/>
-                <a:cs typeface="Courier New" pitchFamily="34" charset="-120"/>
-              </a:rPr>
-              <a:t>connections</a:t>
-            </a:r>
-            <a:r>
-              <a:rPr lang="en-US" sz="1050" dirty="0">
-                <a:solidFill>
-                  <a:srgbClr val="CCCCCC"/>
-                </a:solidFill>
-                <a:latin typeface="Courier New" pitchFamily="34" charset="0"/>
-                <a:ea typeface="Courier New" pitchFamily="34" charset="-122"/>
-                <a:cs typeface="Courier New" pitchFamily="34" charset="-120"/>
-              </a:rPr>
-              <a:t>.</a:t>
             </a:r>
             <a:endParaRPr lang="en-US" sz="1050" dirty="0"/>
           </a:p>
@@ -16333,13 +16368,145 @@
             <a:r>
               <a:rPr lang="en-US" sz="1050" dirty="0">
                 <a:solidFill>
-                  <a:srgbClr val="000000"/>
+                  <a:srgbClr val="569CD6"/>
+                </a:solidFill>
+                <a:latin typeface="Courier New" pitchFamily="34" charset="0"/>
+                <a:ea typeface="Courier New" pitchFamily="34" charset="-122"/>
+                <a:cs typeface="Courier New" pitchFamily="34" charset="-120"/>
+              </a:rPr>
+              <a:t>DATA</a:t>
+            </a:r>
+            <a:r>
+              <a:rPr lang="en-US" sz="1050" dirty="0">
+                <a:solidFill>
+                  <a:srgbClr val="CCCCCC"/>
                 </a:solidFill>
                 <a:latin typeface="Courier New" pitchFamily="34" charset="0"/>
                 <a:ea typeface="Courier New" pitchFamily="34" charset="-122"/>
                 <a:cs typeface="Courier New" pitchFamily="34" charset="-120"/>
               </a:rPr>
               <a:t> </a:t>
+            </a:r>
+            <a:r>
+              <a:rPr lang="en-US" sz="1050" dirty="0">
+                <a:solidFill>
+                  <a:srgbClr val="CCCCCC"/>
+                </a:solidFill>
+                <a:latin typeface="Courier New" pitchFamily="34" charset="0"/>
+                <a:ea typeface="Courier New" pitchFamily="34" charset="-122"/>
+                <a:cs typeface="Courier New" pitchFamily="34" charset="-120"/>
+              </a:rPr>
+              <a:t>textos</a:t>
+            </a:r>
+            <a:r>
+              <a:rPr lang="en-US" sz="1050" dirty="0">
+                <a:solidFill>
+                  <a:srgbClr val="CCCCCC"/>
+                </a:solidFill>
+                <a:latin typeface="Courier New" pitchFamily="34" charset="0"/>
+                <a:ea typeface="Courier New" pitchFamily="34" charset="-122"/>
+                <a:cs typeface="Courier New" pitchFamily="34" charset="-120"/>
+              </a:rPr>
+              <a:t> </a:t>
+            </a:r>
+            <a:r>
+              <a:rPr lang="en-US" sz="1050" dirty="0">
+                <a:solidFill>
+                  <a:srgbClr val="569CD6"/>
+                </a:solidFill>
+                <a:latin typeface="Courier New" pitchFamily="34" charset="0"/>
+                <a:ea typeface="Courier New" pitchFamily="34" charset="-122"/>
+                <a:cs typeface="Courier New" pitchFamily="34" charset="-120"/>
+              </a:rPr>
+              <a:t>TYPE</a:t>
+            </a:r>
+            <a:r>
+              <a:rPr lang="en-US" sz="1050" dirty="0">
+                <a:solidFill>
+                  <a:srgbClr val="CCCCCC"/>
+                </a:solidFill>
+                <a:latin typeface="Courier New" pitchFamily="34" charset="0"/>
+                <a:ea typeface="Courier New" pitchFamily="34" charset="-122"/>
+                <a:cs typeface="Courier New" pitchFamily="34" charset="-120"/>
+              </a:rPr>
+              <a:t> </a:t>
+            </a:r>
+            <a:r>
+              <a:rPr lang="en-US" sz="1050" dirty="0">
+                <a:solidFill>
+                  <a:srgbClr val="569CD6"/>
+                </a:solidFill>
+                <a:latin typeface="Courier New" pitchFamily="34" charset="0"/>
+                <a:ea typeface="Courier New" pitchFamily="34" charset="-122"/>
+                <a:cs typeface="Courier New" pitchFamily="34" charset="-120"/>
+              </a:rPr>
+              <a:t>HASHED</a:t>
+            </a:r>
+            <a:r>
+              <a:rPr lang="en-US" sz="1050" dirty="0">
+                <a:solidFill>
+                  <a:srgbClr val="CCCCCC"/>
+                </a:solidFill>
+                <a:latin typeface="Courier New" pitchFamily="34" charset="0"/>
+                <a:ea typeface="Courier New" pitchFamily="34" charset="-122"/>
+                <a:cs typeface="Courier New" pitchFamily="34" charset="-120"/>
+              </a:rPr>
+              <a:t> </a:t>
+            </a:r>
+            <a:r>
+              <a:rPr lang="en-US" sz="1050" dirty="0">
+                <a:solidFill>
+                  <a:srgbClr val="569CD6"/>
+                </a:solidFill>
+                <a:latin typeface="Courier New" pitchFamily="34" charset="0"/>
+                <a:ea typeface="Courier New" pitchFamily="34" charset="-122"/>
+                <a:cs typeface="Courier New" pitchFamily="34" charset="-120"/>
+              </a:rPr>
+              <a:t>TABLE</a:t>
+            </a:r>
+            <a:r>
+              <a:rPr lang="en-US" sz="1050" dirty="0">
+                <a:solidFill>
+                  <a:srgbClr val="CCCCCC"/>
+                </a:solidFill>
+                <a:latin typeface="Courier New" pitchFamily="34" charset="0"/>
+                <a:ea typeface="Courier New" pitchFamily="34" charset="-122"/>
+                <a:cs typeface="Courier New" pitchFamily="34" charset="-120"/>
+              </a:rPr>
+              <a:t> </a:t>
+            </a:r>
+            <a:r>
+              <a:rPr lang="en-US" sz="1050" dirty="0">
+                <a:solidFill>
+                  <a:srgbClr val="569CD6"/>
+                </a:solidFill>
+                <a:latin typeface="Courier New" pitchFamily="34" charset="0"/>
+                <a:ea typeface="Courier New" pitchFamily="34" charset="-122"/>
+                <a:cs typeface="Courier New" pitchFamily="34" charset="-120"/>
+              </a:rPr>
+              <a:t>OF</a:t>
+            </a:r>
+            <a:r>
+              <a:rPr lang="en-US" sz="1050" dirty="0">
+                <a:solidFill>
+                  <a:srgbClr val="CCCCCC"/>
+                </a:solidFill>
+                <a:latin typeface="Courier New" pitchFamily="34" charset="0"/>
+                <a:ea typeface="Courier New" pitchFamily="34" charset="-122"/>
+                <a:cs typeface="Courier New" pitchFamily="34" charset="-120"/>
+              </a:rPr>
+              <a:t> </a:t>
+            </a:r>
+            <a:r>
+              <a:rPr lang="en-US" sz="1050" dirty="0">
+                <a:solidFill>
+                  <a:srgbClr val="CCCCCC"/>
+                </a:solidFill>
+                <a:latin typeface="Courier New" pitchFamily="34" charset="0"/>
+                <a:ea typeface="Courier New" pitchFamily="34" charset="-122"/>
+                <a:cs typeface="Courier New" pitchFamily="34" charset="-120"/>
+              </a:rPr>
+              <a:t>zta_pc_codelist</a:t>
             </a:r>
             <a:endParaRPr lang="en-US" sz="1050" dirty="0"/>
           </a:p>
@@ -16353,13 +16520,24 @@
             <a:r>
               <a:rPr lang="en-US" sz="1050" dirty="0">
                 <a:solidFill>
+                  <a:srgbClr val="CCCCCC"/>
+                </a:solidFill>
+                <a:latin typeface="Courier New" pitchFamily="34" charset="0"/>
+                <a:ea typeface="Courier New" pitchFamily="34" charset="-122"/>
+                <a:cs typeface="Courier New" pitchFamily="34" charset="-120"/>
+              </a:rPr>
+              <a:t>            </a:t>
+            </a:r>
+            <a:r>
+              <a:rPr lang="en-US" sz="1050" dirty="0">
+                <a:solidFill>
                   <a:srgbClr val="569CD6"/>
                 </a:solidFill>
                 <a:latin typeface="Courier New" pitchFamily="34" charset="0"/>
                 <a:ea typeface="Courier New" pitchFamily="34" charset="-122"/>
                 <a:cs typeface="Courier New" pitchFamily="34" charset="-120"/>
               </a:rPr>
-              <a:t>DATA</a:t>
+              <a:t>WITH</a:t>
             </a:r>
             <a:r>
               <a:rPr lang="en-US" sz="1050" dirty="0">
@@ -16375,13 +16553,13 @@
             <a:r>
               <a:rPr lang="en-US" sz="1050" dirty="0">
                 <a:solidFill>
-                  <a:srgbClr val="CCCCCC"/>
-                </a:solidFill>
-                <a:latin typeface="Courier New" pitchFamily="34" charset="0"/>
-                <a:ea typeface="Courier New" pitchFamily="34" charset="-122"/>
-                <a:cs typeface="Courier New" pitchFamily="34" charset="-120"/>
-              </a:rPr>
-              <a:t>carriers</a:t>
+                  <a:srgbClr val="569CD6"/>
+                </a:solidFill>
+                <a:latin typeface="Courier New" pitchFamily="34" charset="0"/>
+                <a:ea typeface="Courier New" pitchFamily="34" charset="-122"/>
+                <a:cs typeface="Courier New" pitchFamily="34" charset="-120"/>
+              </a:rPr>
+              <a:t>UNIQUE</a:t>
             </a:r>
             <a:r>
               <a:rPr lang="en-US" sz="1050" dirty="0">
@@ -16403,7 +16581,7 @@
                 <a:ea typeface="Courier New" pitchFamily="34" charset="-122"/>
                 <a:cs typeface="Courier New" pitchFamily="34" charset="-120"/>
               </a:rPr>
-              <a:t>TYPE</a:t>
+              <a:t>KEY</a:t>
             </a:r>
             <a:r>
               <a:rPr lang="en-US" sz="1050" dirty="0">
@@ -16419,13 +16597,13 @@
             <a:r>
               <a:rPr lang="en-US" sz="1050" dirty="0">
                 <a:solidFill>
-                  <a:srgbClr val="569CD6"/>
-                </a:solidFill>
-                <a:latin typeface="Courier New" pitchFamily="34" charset="0"/>
-                <a:ea typeface="Courier New" pitchFamily="34" charset="-122"/>
-                <a:cs typeface="Courier New" pitchFamily="34" charset="-120"/>
-              </a:rPr>
-              <a:t>HASHED</a:t>
+                  <a:srgbClr val="CCCCCC"/>
+                </a:solidFill>
+                <a:latin typeface="Courier New" pitchFamily="34" charset="0"/>
+                <a:ea typeface="Courier New" pitchFamily="34" charset="-122"/>
+                <a:cs typeface="Courier New" pitchFamily="34" charset="-120"/>
+              </a:rPr>
+              <a:t>lista</a:t>
             </a:r>
             <a:r>
               <a:rPr lang="en-US" sz="1050" dirty="0">
@@ -16441,154 +16619,13 @@
             <a:r>
               <a:rPr lang="en-US" sz="1050" dirty="0">
                 <a:solidFill>
-                  <a:srgbClr val="569CD6"/>
-                </a:solidFill>
-                <a:latin typeface="Courier New" pitchFamily="34" charset="0"/>
-                <a:ea typeface="Courier New" pitchFamily="34" charset="-122"/>
-                <a:cs typeface="Courier New" pitchFamily="34" charset="-120"/>
-              </a:rPr>
-              <a:t>TABLE</a:t>
-            </a:r>
-            <a:r>
-              <a:rPr lang="en-US" sz="1050" dirty="0">
-                <a:solidFill>
-                  <a:srgbClr val="CCCCCC"/>
-                </a:solidFill>
-                <a:latin typeface="Courier New" pitchFamily="34" charset="0"/>
-                <a:ea typeface="Courier New" pitchFamily="34" charset="-122"/>
-                <a:cs typeface="Courier New" pitchFamily="34" charset="-120"/>
-              </a:rPr>
-              <a:t> </a:t>
-            </a:r>
-            <a:r>
-              <a:rPr lang="en-US" sz="1050" dirty="0">
-                <a:solidFill>
-                  <a:srgbClr val="569CD6"/>
-                </a:solidFill>
-                <a:latin typeface="Courier New" pitchFamily="34" charset="0"/>
-                <a:ea typeface="Courier New" pitchFamily="34" charset="-122"/>
-                <a:cs typeface="Courier New" pitchFamily="34" charset="-120"/>
-              </a:rPr>
-              <a:t>OF</a:t>
-            </a:r>
-            <a:r>
-              <a:rPr lang="en-US" sz="1050" dirty="0">
-                <a:solidFill>
-                  <a:srgbClr val="CCCCCC"/>
-                </a:solidFill>
-                <a:latin typeface="Courier New" pitchFamily="34" charset="0"/>
-                <a:ea typeface="Courier New" pitchFamily="34" charset="-122"/>
-                <a:cs typeface="Courier New" pitchFamily="34" charset="-120"/>
-              </a:rPr>
-              <a:t> </a:t>
-            </a:r>
-            <a:r>
-              <a:rPr lang="en-US" sz="1050" dirty="0">
-                <a:solidFill>
-                  <a:srgbClr val="4EC9B0"/>
-                </a:solidFill>
-                <a:latin typeface="Courier New" pitchFamily="34" charset="0"/>
-                <a:ea typeface="Courier New" pitchFamily="34" charset="-122"/>
-                <a:cs typeface="Courier New" pitchFamily="34" charset="-120"/>
-              </a:rPr>
-              <a:t>/dmo/carrier</a:t>
-            </a:r>
-            <a:endParaRPr lang="en-US" sz="1050" dirty="0"/>
-          </a:p>
-          <a:p>
-            <a:pPr indent="0" marL="0">
-              <a:lnSpc>
-                <a:spcPct val="105000"/>
-              </a:lnSpc>
-              <a:buNone/>
-            </a:pPr>
-            <a:r>
-              <a:rPr lang="en-US" sz="1050" dirty="0">
-                <a:solidFill>
-                  <a:srgbClr val="CCCCCC"/>
-                </a:solidFill>
-                <a:latin typeface="Courier New" pitchFamily="34" charset="0"/>
-                <a:ea typeface="Courier New" pitchFamily="34" charset="-122"/>
-                <a:cs typeface="Courier New" pitchFamily="34" charset="-120"/>
-              </a:rPr>
-              <a:t>              </a:t>
-            </a:r>
-            <a:r>
-              <a:rPr lang="en-US" sz="1050" dirty="0">
-                <a:solidFill>
-                  <a:srgbClr val="569CD6"/>
-                </a:solidFill>
-                <a:latin typeface="Courier New" pitchFamily="34" charset="0"/>
-                <a:ea typeface="Courier New" pitchFamily="34" charset="-122"/>
-                <a:cs typeface="Courier New" pitchFamily="34" charset="-120"/>
-              </a:rPr>
-              <a:t>WITH</a:t>
-            </a:r>
-            <a:r>
-              <a:rPr lang="en-US" sz="1050" dirty="0">
-                <a:solidFill>
-                  <a:srgbClr val="CCCCCC"/>
-                </a:solidFill>
-                <a:latin typeface="Courier New" pitchFamily="34" charset="0"/>
-                <a:ea typeface="Courier New" pitchFamily="34" charset="-122"/>
-                <a:cs typeface="Courier New" pitchFamily="34" charset="-120"/>
-              </a:rPr>
-              <a:t> </a:t>
-            </a:r>
-            <a:r>
-              <a:rPr lang="en-US" sz="1050" dirty="0">
-                <a:solidFill>
-                  <a:srgbClr val="569CD6"/>
-                </a:solidFill>
-                <a:latin typeface="Courier New" pitchFamily="34" charset="0"/>
-                <a:ea typeface="Courier New" pitchFamily="34" charset="-122"/>
-                <a:cs typeface="Courier New" pitchFamily="34" charset="-120"/>
-              </a:rPr>
-              <a:t>UNIQUE</a:t>
-            </a:r>
-            <a:r>
-              <a:rPr lang="en-US" sz="1050" dirty="0">
-                <a:solidFill>
-                  <a:srgbClr val="CCCCCC"/>
-                </a:solidFill>
-                <a:latin typeface="Courier New" pitchFamily="34" charset="0"/>
-                <a:ea typeface="Courier New" pitchFamily="34" charset="-122"/>
-                <a:cs typeface="Courier New" pitchFamily="34" charset="-120"/>
-              </a:rPr>
-              <a:t> </a:t>
-            </a:r>
-            <a:r>
-              <a:rPr lang="en-US" sz="1050" dirty="0">
-                <a:solidFill>
-                  <a:srgbClr val="569CD6"/>
-                </a:solidFill>
-                <a:latin typeface="Courier New" pitchFamily="34" charset="0"/>
-                <a:ea typeface="Courier New" pitchFamily="34" charset="-122"/>
-                <a:cs typeface="Courier New" pitchFamily="34" charset="-120"/>
-              </a:rPr>
-              <a:t>KEY</a:t>
-            </a:r>
-            <a:r>
-              <a:rPr lang="en-US" sz="1050" dirty="0">
-                <a:solidFill>
-                  <a:srgbClr val="CCCCCC"/>
-                </a:solidFill>
-                <a:latin typeface="Courier New" pitchFamily="34" charset="0"/>
-                <a:ea typeface="Courier New" pitchFamily="34" charset="-122"/>
-                <a:cs typeface="Courier New" pitchFamily="34" charset="-120"/>
-              </a:rPr>
-              <a:t> </a:t>
-            </a:r>
-            <a:r>
-              <a:rPr lang="en-US" sz="1050" dirty="0">
-                <a:solidFill>
-                  <a:srgbClr val="CCCCCC"/>
-                </a:solidFill>
-                <a:latin typeface="Courier New" pitchFamily="34" charset="0"/>
-                <a:ea typeface="Courier New" pitchFamily="34" charset="-122"/>
-                <a:cs typeface="Courier New" pitchFamily="34" charset="-120"/>
-              </a:rPr>
-              <a:t>carrier_id</a:t>
+                  <a:srgbClr val="CCCCCC"/>
+                </a:solidFill>
+                <a:latin typeface="Courier New" pitchFamily="34" charset="0"/>
+                <a:ea typeface="Courier New" pitchFamily="34" charset="-122"/>
+                <a:cs typeface="Courier New" pitchFamily="34" charset="-120"/>
+              </a:rPr>
+              <a:t>codigo</a:t>
             </a:r>
             <a:r>
               <a:rPr lang="en-US" sz="1050" dirty="0">
@@ -16753,7 +16790,7 @@
                 <a:ea typeface="Courier New" pitchFamily="34" charset="-122"/>
                 <a:cs typeface="Courier New" pitchFamily="34" charset="-120"/>
               </a:rPr>
-              <a:t>st_connection</a:t>
+              <a:t>st_item</a:t>
             </a:r>
             <a:r>
               <a:rPr lang="en-US" sz="1050" dirty="0">
@@ -17817,7 +17854,7 @@
         <p:spPr>
           <a:xfrm>
             <a:off x="640080" y="1700784"/>
-            <a:ext cx="1997964" cy="292608"/>
+            <a:ext cx="2619756" cy="292608"/>
           </a:xfrm>
           <a:prstGeom prst="rect">
             <a:avLst/>
@@ -17837,7 +17874,7 @@
         <p:spPr>
           <a:xfrm>
             <a:off x="640080" y="1700784"/>
-            <a:ext cx="1997964" cy="27432"/>
+            <a:ext cx="2619756" cy="27432"/>
           </a:xfrm>
           <a:prstGeom prst="rect">
             <a:avLst/>
@@ -17857,7 +17894,7 @@
         <p:spPr>
           <a:xfrm>
             <a:off x="731520" y="1719072"/>
-            <a:ext cx="1815084" cy="274320"/>
+            <a:ext cx="2436876" cy="274320"/>
           </a:xfrm>
           <a:prstGeom prst="rect">
             <a:avLst/>
@@ -17878,7 +17915,7 @@
                   <a:srgbClr val="FFFFFF"/>
                 </a:solidFill>
               </a:rPr>
-              <a:t>zcl_06_itab.clas.abap</a:t>
+              <a:t>zcl_pc_tabelas_demo.clas.abap</a:t>
             </a:r>
             <a:endParaRPr lang="en-US" sz="950" dirty="0"/>
           </a:p>
@@ -17914,7 +17951,7 @@
                   <a:srgbClr val="9DA5B4"/>
                 </a:solidFill>
               </a:rPr>
-              <a:t>ZS4D400_## › ZCL_06_ITAB › main</a:t>
+              <a:t>Exemplo sobre ZAVBS_PC_ESTOQUE › main</a:t>
             </a:r>
             <a:endParaRPr lang="en-US" sz="850" dirty="0"/>
           </a:p>
@@ -18318,7 +18355,7 @@
                 <a:ea typeface="Courier New" pitchFamily="34" charset="-122"/>
                 <a:cs typeface="Courier New" pitchFamily="34" charset="-120"/>
               </a:rPr>
-              <a:t>connection</a:t>
+              <a:t>item</a:t>
             </a:r>
             <a:r>
               <a:rPr lang="en-US" sz="950" dirty="0">
@@ -18417,7 +18454,7 @@
                 <a:ea typeface="Courier New" pitchFamily="34" charset="-122"/>
                 <a:cs typeface="Courier New" pitchFamily="34" charset="-120"/>
               </a:rPr>
-              <a:t>carrier_id</a:t>
+              <a:t>sku</a:t>
             </a:r>
             <a:r>
               <a:rPr lang="en-US" sz="950" dirty="0">
@@ -18461,7 +18498,7 @@
                 <a:ea typeface="Courier New" pitchFamily="34" charset="-122"/>
                 <a:cs typeface="Courier New" pitchFamily="34" charset="-120"/>
               </a:rPr>
-              <a:t>'NN'</a:t>
+              <a:t>'SKU-ELE-0000000001'</a:t>
             </a:r>
             <a:r>
               <a:rPr lang="en-US" sz="950" dirty="0">
@@ -18483,7 +18520,7 @@
                 <a:ea typeface="Courier New" pitchFamily="34" charset="-122"/>
                 <a:cs typeface="Courier New" pitchFamily="34" charset="-120"/>
               </a:rPr>
-              <a:t>connection_id</a:t>
+              <a:t>nome</a:t>
             </a:r>
             <a:r>
               <a:rPr lang="en-US" sz="950" dirty="0">
@@ -18527,7 +18564,7 @@
                 <a:ea typeface="Courier New" pitchFamily="34" charset="-122"/>
                 <a:cs typeface="Courier New" pitchFamily="34" charset="-120"/>
               </a:rPr>
-              <a:t>'1234'</a:t>
+              <a:t>'Fone Bluetooth'</a:t>
             </a:r>
             <a:endParaRPr lang="en-US" sz="950" dirty="0"/>
           </a:p>
@@ -18547,7 +18584,7 @@
                 <a:ea typeface="Courier New" pitchFamily="34" charset="-122"/>
                 <a:cs typeface="Courier New" pitchFamily="34" charset="-120"/>
               </a:rPr>
-              <a:t>                      </a:t>
+              <a:t>                </a:t>
             </a:r>
             <a:r>
               <a:rPr lang="en-US" sz="950" dirty="0">
@@ -18558,7 +18595,7 @@
                 <a:ea typeface="Courier New" pitchFamily="34" charset="-122"/>
                 <a:cs typeface="Courier New" pitchFamily="34" charset="-120"/>
               </a:rPr>
-              <a:t>airport_from_id</a:t>
+              <a:t>categoria</a:t>
             </a:r>
             <a:r>
               <a:rPr lang="en-US" sz="950" dirty="0">
@@ -18602,7 +18639,7 @@
                 <a:ea typeface="Courier New" pitchFamily="34" charset="-122"/>
                 <a:cs typeface="Courier New" pitchFamily="34" charset="-120"/>
               </a:rPr>
-              <a:t>'ABC'</a:t>
+              <a:t>'ELETRONICOS'</a:t>
             </a:r>
             <a:r>
               <a:rPr lang="en-US" sz="950" dirty="0">
@@ -18624,7 +18661,7 @@
                 <a:ea typeface="Courier New" pitchFamily="34" charset="-122"/>
                 <a:cs typeface="Courier New" pitchFamily="34" charset="-120"/>
               </a:rPr>
-              <a:t>airport_to_id</a:t>
+              <a:t>qtde_disponivel</a:t>
             </a:r>
             <a:r>
               <a:rPr lang="en-US" sz="950" dirty="0">
@@ -18662,13 +18699,13 @@
             <a:r>
               <a:rPr lang="en-US" sz="950" dirty="0">
                 <a:solidFill>
-                  <a:srgbClr val="CE9178"/>
-                </a:solidFill>
-                <a:latin typeface="Courier New" pitchFamily="34" charset="0"/>
-                <a:ea typeface="Courier New" pitchFamily="34" charset="-122"/>
-                <a:cs typeface="Courier New" pitchFamily="34" charset="-120"/>
-              </a:rPr>
-              <a:t>'XYZ'</a:t>
+                  <a:srgbClr val="B5CEA8"/>
+                </a:solidFill>
+                <a:latin typeface="Courier New" pitchFamily="34" charset="0"/>
+                <a:ea typeface="Courier New" pitchFamily="34" charset="-122"/>
+                <a:cs typeface="Courier New" pitchFamily="34" charset="-120"/>
+              </a:rPr>
+              <a:t>25</a:t>
             </a:r>
             <a:r>
               <a:rPr lang="en-US" sz="950" dirty="0">
@@ -18743,7 +18780,7 @@
                 <a:ea typeface="Courier New" pitchFamily="34" charset="-122"/>
                 <a:cs typeface="Courier New" pitchFamily="34" charset="-120"/>
               </a:rPr>
-              <a:t>connection</a:t>
+              <a:t>item</a:t>
             </a:r>
             <a:r>
               <a:rPr lang="en-US" sz="950" dirty="0">
@@ -18809,7 +18846,7 @@
                 <a:ea typeface="Courier New" pitchFamily="34" charset="-122"/>
                 <a:cs typeface="Courier New" pitchFamily="34" charset="-120"/>
               </a:rPr>
-              <a:t>connections</a:t>
+              <a:t>itens</a:t>
             </a:r>
             <a:r>
               <a:rPr lang="en-US" sz="950" dirty="0">
@@ -18957,7 +18994,7 @@
                 <a:ea typeface="Courier New" pitchFamily="34" charset="-122"/>
                 <a:cs typeface="Courier New" pitchFamily="34" charset="-120"/>
               </a:rPr>
-              <a:t>carrier_id</a:t>
+              <a:t>sku</a:t>
             </a:r>
             <a:r>
               <a:rPr lang="en-US" sz="950" dirty="0">
@@ -19001,7 +19038,7 @@
                 <a:ea typeface="Courier New" pitchFamily="34" charset="-122"/>
                 <a:cs typeface="Courier New" pitchFamily="34" charset="-120"/>
               </a:rPr>
-              <a:t>'LH'</a:t>
+              <a:t>'SKU-INF-0000000002'</a:t>
             </a:r>
             <a:r>
               <a:rPr lang="en-US" sz="950" dirty="0">
@@ -19023,7 +19060,7 @@
                 <a:ea typeface="Courier New" pitchFamily="34" charset="-122"/>
                 <a:cs typeface="Courier New" pitchFamily="34" charset="-120"/>
               </a:rPr>
-              <a:t>connection_id</a:t>
+              <a:t>nome</a:t>
             </a:r>
             <a:r>
               <a:rPr lang="en-US" sz="950" dirty="0">
@@ -19067,7 +19104,7 @@
                 <a:ea typeface="Courier New" pitchFamily="34" charset="-122"/>
                 <a:cs typeface="Courier New" pitchFamily="34" charset="-120"/>
               </a:rPr>
-              <a:t>'0400'</a:t>
+              <a:t>'Mouse sem fio'</a:t>
             </a:r>
             <a:r>
               <a:rPr lang="en-US" sz="950" dirty="0">
@@ -19164,7 +19201,7 @@
                 <a:ea typeface="Courier New" pitchFamily="34" charset="-122"/>
                 <a:cs typeface="Courier New" pitchFamily="34" charset="-120"/>
               </a:rPr>
-              <a:t>connections</a:t>
+              <a:t>itens</a:t>
             </a:r>
             <a:r>
               <a:rPr lang="en-US" sz="950" dirty="0">
@@ -19235,7 +19272,7 @@
                 <a:ea typeface="Courier New" pitchFamily="34" charset="-122"/>
                 <a:cs typeface="Courier New" pitchFamily="34" charset="-120"/>
               </a:rPr>
-              <a:t>carrier_list</a:t>
+              <a:t>pedido_itens</a:t>
             </a:r>
             <a:r>
               <a:rPr lang="en-US" sz="950" dirty="0">
@@ -19356,7 +19393,7 @@
                 <a:ea typeface="Courier New" pitchFamily="34" charset="-122"/>
                 <a:cs typeface="Courier New" pitchFamily="34" charset="-120"/>
               </a:rPr>
-              <a:t>carrier_id</a:t>
+              <a:t>sku</a:t>
             </a:r>
             <a:r>
               <a:rPr lang="en-US" sz="950" dirty="0">
@@ -19400,7 +19437,7 @@
                 <a:ea typeface="Courier New" pitchFamily="34" charset="-122"/>
                 <a:cs typeface="Courier New" pitchFamily="34" charset="-120"/>
               </a:rPr>
-              <a:t>'AA'</a:t>
+              <a:t>'SKU-ELE-0000000001'</a:t>
             </a:r>
             <a:r>
               <a:rPr lang="en-US" sz="950" dirty="0">
@@ -19422,7 +19459,7 @@
                 <a:ea typeface="Courier New" pitchFamily="34" charset="-122"/>
                 <a:cs typeface="Courier New" pitchFamily="34" charset="-120"/>
               </a:rPr>
-              <a:t>carrier_name</a:t>
+              <a:t>qtde</a:t>
             </a:r>
             <a:r>
               <a:rPr lang="en-US" sz="950" dirty="0">
@@ -19460,13 +19497,13 @@
             <a:r>
               <a:rPr lang="en-US" sz="950" dirty="0">
                 <a:solidFill>
-                  <a:srgbClr val="CE9178"/>
-                </a:solidFill>
-                <a:latin typeface="Courier New" pitchFamily="34" charset="0"/>
-                <a:ea typeface="Courier New" pitchFamily="34" charset="-122"/>
-                <a:cs typeface="Courier New" pitchFamily="34" charset="-120"/>
-              </a:rPr>
-              <a:t>'American'</a:t>
+                  <a:srgbClr val="B5CEA8"/>
+                </a:solidFill>
+                <a:latin typeface="Courier New" pitchFamily="34" charset="0"/>
+                <a:ea typeface="Courier New" pitchFamily="34" charset="-122"/>
+                <a:cs typeface="Courier New" pitchFamily="34" charset="-120"/>
+              </a:rPr>
+              <a:t>2</a:t>
             </a:r>
             <a:r>
               <a:rPr lang="en-US" sz="950" dirty="0">
@@ -19541,7 +19578,7 @@
                 <a:ea typeface="Courier New" pitchFamily="34" charset="-122"/>
                 <a:cs typeface="Courier New" pitchFamily="34" charset="-120"/>
               </a:rPr>
-              <a:t>carrier_id</a:t>
+              <a:t>sku</a:t>
             </a:r>
             <a:r>
               <a:rPr lang="en-US" sz="950" dirty="0">
@@ -19585,7 +19622,7 @@
                 <a:ea typeface="Courier New" pitchFamily="34" charset="-122"/>
                 <a:cs typeface="Courier New" pitchFamily="34" charset="-120"/>
               </a:rPr>
-              <a:t>'JL'</a:t>
+              <a:t>'SKU-INF-0000000002'</a:t>
             </a:r>
             <a:r>
               <a:rPr lang="en-US" sz="950" dirty="0">
@@ -19607,7 +19644,7 @@
                 <a:ea typeface="Courier New" pitchFamily="34" charset="-122"/>
                 <a:cs typeface="Courier New" pitchFamily="34" charset="-120"/>
               </a:rPr>
-              <a:t>carrier_name</a:t>
+              <a:t>qtde</a:t>
             </a:r>
             <a:r>
               <a:rPr lang="en-US" sz="950" dirty="0">
@@ -19645,13 +19682,13 @@
             <a:r>
               <a:rPr lang="en-US" sz="950" dirty="0">
                 <a:solidFill>
-                  <a:srgbClr val="CE9178"/>
-                </a:solidFill>
-                <a:latin typeface="Courier New" pitchFamily="34" charset="0"/>
-                <a:ea typeface="Courier New" pitchFamily="34" charset="-122"/>
-                <a:cs typeface="Courier New" pitchFamily="34" charset="-120"/>
-              </a:rPr>
-              <a:t>'Japan'</a:t>
+                  <a:srgbClr val="B5CEA8"/>
+                </a:solidFill>
+                <a:latin typeface="Courier New" pitchFamily="34" charset="0"/>
+                <a:ea typeface="Courier New" pitchFamily="34" charset="-122"/>
+                <a:cs typeface="Courier New" pitchFamily="34" charset="-120"/>
+              </a:rPr>
+              <a:t>1</a:t>
             </a:r>
             <a:r>
               <a:rPr lang="en-US" sz="950" dirty="0">
@@ -19726,7 +19763,7 @@
                 <a:ea typeface="Courier New" pitchFamily="34" charset="-122"/>
                 <a:cs typeface="Courier New" pitchFamily="34" charset="-120"/>
               </a:rPr>
-              <a:t>carrier_id</a:t>
+              <a:t>sku</a:t>
             </a:r>
             <a:r>
               <a:rPr lang="en-US" sz="950" dirty="0">
@@ -19770,7 +19807,7 @@
                 <a:ea typeface="Courier New" pitchFamily="34" charset="-122"/>
                 <a:cs typeface="Courier New" pitchFamily="34" charset="-120"/>
               </a:rPr>
-              <a:t>'SQ'</a:t>
+              <a:t>'SKU-ESC-0000000003'</a:t>
             </a:r>
             <a:r>
               <a:rPr lang="en-US" sz="950" dirty="0">
@@ -19792,7 +19829,7 @@
                 <a:ea typeface="Courier New" pitchFamily="34" charset="-122"/>
                 <a:cs typeface="Courier New" pitchFamily="34" charset="-120"/>
               </a:rPr>
-              <a:t>carrier_name</a:t>
+              <a:t>qtde</a:t>
             </a:r>
             <a:r>
               <a:rPr lang="en-US" sz="950" dirty="0">
@@ -19830,13 +19867,13 @@
             <a:r>
               <a:rPr lang="en-US" sz="950" dirty="0">
                 <a:solidFill>
-                  <a:srgbClr val="CE9178"/>
-                </a:solidFill>
-                <a:latin typeface="Courier New" pitchFamily="34" charset="0"/>
-                <a:ea typeface="Courier New" pitchFamily="34" charset="-122"/>
-                <a:cs typeface="Courier New" pitchFamily="34" charset="-120"/>
-              </a:rPr>
-              <a:t>'Singapore'</a:t>
+                  <a:srgbClr val="B5CEA8"/>
+                </a:solidFill>
+                <a:latin typeface="Courier New" pitchFamily="34" charset="0"/>
+                <a:ea typeface="Courier New" pitchFamily="34" charset="-122"/>
+                <a:cs typeface="Courier New" pitchFamily="34" charset="-120"/>
+              </a:rPr>
+              <a:t>5</a:t>
             </a:r>
             <a:r>
               <a:rPr lang="en-US" sz="950" dirty="0">
@@ -19951,7 +19988,7 @@
                 <a:ea typeface="Courier New" pitchFamily="34" charset="-122"/>
                 <a:cs typeface="Courier New" pitchFamily="34" charset="-120"/>
               </a:rPr>
-              <a:t>connections</a:t>
+              <a:t>itens</a:t>
             </a:r>
             <a:r>
               <a:rPr lang="en-US" sz="950" dirty="0">
@@ -20050,7 +20087,7 @@
                 <a:ea typeface="Courier New" pitchFamily="34" charset="-122"/>
                 <a:cs typeface="Courier New" pitchFamily="34" charset="-120"/>
               </a:rPr>
-              <a:t>carrier_list</a:t>
+              <a:t>pedido_itens</a:t>
             </a:r>
             <a:r>
               <a:rPr lang="en-US" sz="950" dirty="0">
